--- a/sessions/s01_what_is_machine_learning/teaching/slides/slides.pptx
+++ b/sessions/s01_what_is_machine_learning/teaching/slides/slides.pptx
@@ -31,6 +31,8 @@
     <p:sldId id="279" r:id="rId31"/>
     <p:sldId id="280" r:id="rId32"/>
     <p:sldId id="281" r:id="rId33"/>
+    <p:sldId id="282" r:id="rId34"/>
+    <p:sldId id="283" r:id="rId35"/>
   </p:sldIdLst>
   <p:sldSz cx="12191695" cy="6858000" type="screen4x3"/>
   <p:notesSz cx="6858000" cy="9144000"/>
@@ -797,7 +799,7 @@
               <a:rPr>
                 <a:latin typeface="Vazirmatn"/>
               </a:rPr>
-              <a:t>Hooks: feature = fingerprint; label = the answer; example = one solved exercise.</a:t>
+              <a:t>Hooks (from the analogy map, nothing ad-hoc): feature = a clue; label = the answer; example = one solved exercise.</a:t>
             </a:r>
           </a:p>
           <a:p>
@@ -975,7 +977,7 @@
               <a:rPr>
                 <a:latin typeface="Vazirmatn"/>
               </a:rPr>
-              <a:t>[20:00] Segment C. LIVE MINI-GAME: 4 solved fruit examples, then a 5th with hidden label — class predicts.</a:t>
+              <a:t>EXPERIENCE before code: the class chains its own guesses.</a:t>
             </a:r>
           </a:p>
           <a:p>
@@ -983,7 +985,7 @@
               <a:rPr>
                 <a:latin typeface="Vazirmatn"/>
               </a:rPr>
-              <a:t>SAY: "You just did supervised learning. Personally."</a:t>
+              <a:t>DRAW with them: "red? apple. not red, long? banana. else grapes."</a:t>
             </a:r>
           </a:p>
           <a:p>
@@ -991,7 +993,7 @@
               <a:rPr>
                 <a:latin typeface="Vazirmatn"/>
               </a:rPr>
-              <a:t>RUN cell A3: study table vs quiz table.</a:t>
+              <a:t>The decision tree arrives INTUITIVELY. The NAME is withheld until Session 2.</a:t>
             </a:r>
           </a:p>
         </p:txBody>
@@ -1064,7 +1066,7 @@
               <a:rPr>
                 <a:latin typeface="Vazirmatn"/>
               </a:rPr>
-              <a:t>[MISCONCEPTION] "supervised" does NOT mean a person watches the model — the data has answers.</a:t>
+              <a:t>SHOW the fruit decision map. TRACE one fruit together: purple, small, wrinkly -&gt; grapes.</a:t>
             </a:r>
           </a:p>
           <a:p>
@@ -1072,7 +1074,55 @@
               <a:rPr>
                 <a:latin typeface="Vazirmatn"/>
               </a:rPr>
-              <a:t>Use the laugh, then CHECK: "Why 'supervised'?" — examples come with answers.</a:t>
+              <a:t>[HONESTY BEAT — do it!] The map MISJUDGES 2 of the 6 fruits in A1's own table:</a:t>
+            </a:r>
+          </a:p>
+          <a:p>
+            <a:r>
+              <a:rPr>
+                <a:latin typeface="Vazirmatn"/>
+              </a:rPr>
+              <a:t>the green medium apple (map says grapes) and the yellow medium banana (map says grapes).</a:t>
+            </a:r>
+          </a:p>
+          <a:p>
+            <a:r>
+              <a:rPr>
+                <a:latin typeface="Vazirmatn"/>
+              </a:rPr>
+              <a:t>Trace the green apple on purpose, hit the wrong room, and SAY: "Our hand-drawn rules</a:t>
+            </a:r>
+          </a:p>
+          <a:p>
+            <a:r>
+              <a:rPr>
+                <a:latin typeface="Vazirmatn"/>
+              </a:rPr>
+              <a:t>already fail on 2 fruits out of 6 — now imagine 8 million pictures. THIS is why</a:t>
+            </a:r>
+          </a:p>
+          <a:p>
+            <a:r>
+              <a:rPr>
+                <a:latin typeface="Vazirmatn"/>
+              </a:rPr>
+              <a:t>the machine learns the map FROM the data instead." (This seed becomes Session 2's hook.)</a:t>
+            </a:r>
+          </a:p>
+          <a:p>
+            <a:r>
+              <a:rPr>
+                <a:latin typeface="Vazirmatn"/>
+              </a:rPr>
+              <a:t>SAY: "A human drew this. Next session: the MACHINE draws its own map — by itself."</a:t>
+            </a:r>
+          </a:p>
+          <a:p>
+            <a:r>
+              <a:rPr>
+                <a:latin typeface="Vazirmatn"/>
+              </a:rPr>
+              <a:t>DO NOT say "decision tree" yet.</a:t>
             </a:r>
           </a:p>
         </p:txBody>
@@ -1145,7 +1195,7 @@
               <a:rPr>
                 <a:latin typeface="Vazirmatn"/>
               </a:rPr>
-              <a:t>[30:00] Segment D: Titanic as pictures. Students follow cells A4-A6.</a:t>
+              <a:t>[20:00] Segment C. LIVE MINI-GAME: 4 solved fruit examples, then a 5th with hidden label — class predicts.</a:t>
             </a:r>
           </a:p>
           <a:p>
@@ -1153,7 +1203,7 @@
               <a:rPr>
                 <a:latin typeface="Vazirmatn"/>
               </a:rPr>
-              <a:t>NARRATE THE HISTORY while plotting — the story is the engine.</a:t>
+              <a:t>The picture IS the concept: LEFT table = study with the answer key, RIGHT table = the new exam, answers hidden.</a:t>
             </a:r>
           </a:p>
           <a:p>
@@ -1161,7 +1211,15 @@
               <a:rPr>
                 <a:latin typeface="Vazirmatn"/>
               </a:rPr>
-              <a:t>A4: 891 passengers, each row a life.</a:t>
+              <a:t>SAY: "You just did supervised learning. Personally."</a:t>
+            </a:r>
+          </a:p>
+          <a:p>
+            <a:r>
+              <a:rPr>
+                <a:latin typeface="Vazirmatn"/>
+              </a:rPr>
+              <a:t>RUN cell A3: study table vs quiz table — the code version of exactly this picture.</a:t>
             </a:r>
           </a:p>
         </p:txBody>
@@ -1234,7 +1292,7 @@
               <a:rPr>
                 <a:latin typeface="Vazirmatn"/>
               </a:rPr>
-              <a:t>[RUN cell A5] More died than survived — 549 vs 342.</a:t>
+              <a:t>[MISCONCEPTION] "supervised" does NOT mean a person watches the model — the data has answers.</a:t>
             </a:r>
           </a:p>
           <a:p>
@@ -1242,7 +1300,7 @@
               <a:rPr>
                 <a:latin typeface="Vazirmatn"/>
               </a:rPr>
-              <a:t>RULE (course-wide): every dataset gets PLOTTED before MODELED.</a:t>
+              <a:t>Use the laugh, then CHECK: "Why 'supervised'?" — examples come with answers.</a:t>
             </a:r>
           </a:p>
         </p:txBody>
@@ -1315,7 +1373,7 @@
               <a:rPr>
                 <a:latin typeface="Vazirmatn"/>
               </a:rPr>
-              <a:t>[RUN cell A6] THE PUNCHLINE PLOTS. Let students read the bars first.</a:t>
+              <a:t>[30:00] Segment D: Titanic as pictures. Students follow cells A4-A6.</a:t>
             </a:r>
           </a:p>
           <a:p>
@@ -1323,7 +1381,7 @@
               <a:rPr>
                 <a:latin typeface="Vazirmatn"/>
               </a:rPr>
-              <a:t>ASK: "Which feature matters for survival?" — sex, then class.</a:t>
+              <a:t>NARRATE THE HISTORY while plotting — the story is the engine.</a:t>
             </a:r>
           </a:p>
           <a:p>
@@ -1331,7 +1389,15 @@
               <a:rPr>
                 <a:latin typeface="Vazirmatn"/>
               </a:rPr>
-              <a:t>SAY: "A rich woman in 1912 had close to a survival ticket."</a:t>
+              <a:t>A4: 891 passengers in the raw file; the cell prints that only the 712 rows with</a:t>
+            </a:r>
+          </a:p>
+          <a:p>
+            <a:r>
+              <a:rPr>
+                <a:latin typeface="Vazirmatn"/>
+              </a:rPr>
+              <a:t>COMPLETE info teach the model. 10-second beat: "real data has holes — we keep the complete rows."</a:t>
             </a:r>
           </a:p>
         </p:txBody>
@@ -1404,7 +1470,7 @@
               <a:rPr>
                 <a:latin typeface="Vazirmatn"/>
               </a:rPr>
-              <a:t>[40:00] Segment E — emotional peak. Students TYPE ALONG cells A7-A9 (not just watch).</a:t>
+              <a:t>[RUN cell A5] More died than survived — 424 vs 288 of the 712 complete rows.</a:t>
             </a:r>
           </a:p>
           <a:p>
@@ -1412,15 +1478,7 @@
               <a:rPr>
                 <a:latin typeface="Vazirmatn"/>
               </a:rPr>
-              <a:t>A7: X and y separated — "line 0 is setup, not magic."</a:t>
-            </a:r>
-          </a:p>
-          <a:p>
-            <a:r>
-              <a:rPr>
-                <a:latin typeface="Vazirmatn"/>
-              </a:rPr>
-              <a:t>CEREMONY before fit(): "On three, everyone say LEARN."</a:t>
+              <a:t>RULE (course-wide): every dataset gets PLOTTED before MODELED.</a:t>
             </a:r>
           </a:p>
         </p:txBody>
@@ -1582,7 +1640,7 @@
               <a:rPr>
                 <a:latin typeface="Vazirmatn"/>
               </a:rPr>
-              <a:t>[RUN cell A8, students typing] Write the 3 lines LARGE on the board.</a:t>
+              <a:t>[RUN cell A6] THE PUNCHLINE PLOTS. Let students read the bars first.</a:t>
             </a:r>
           </a:p>
           <a:p>
@@ -1590,7 +1648,7 @@
               <a:rPr>
                 <a:latin typeface="Vazirmatn"/>
               </a:rPr>
-              <a:t>create = pick a student; fit = let it study; predict = ask, label hidden.</a:t>
+              <a:t>ASK: "Which feature matters for survival?" — gender, then class.</a:t>
             </a:r>
           </a:p>
           <a:p>
@@ -1598,7 +1656,7 @@
               <a:rPr>
                 <a:latin typeface="Vazirmatn"/>
               </a:rPr>
-              <a:t>SAY: "Every model you'll ever meet follows these three lines."</a:t>
+              <a:t>SAY: "A rich woman in 1912 had close to a survival ticket."</a:t>
             </a:r>
           </a:p>
         </p:txBody>
@@ -1671,7 +1729,7 @@
               <a:rPr>
                 <a:latin typeface="Vazirmatn"/>
               </a:rPr>
-              <a:t>[RUN cell A9] Predict for a volunteer: "Would Sara, 2nd class, age 13, survive?"</a:t>
+              <a:t>[40:00] Segment E — emotional peak. Students TYPE ALONG cells A7-A9 (not just watch).</a:t>
             </a:r>
           </a:p>
           <a:p>
@@ -1679,7 +1737,7 @@
               <a:rPr>
                 <a:latin typeface="Vazirmatn"/>
               </a:rPr>
-              <a:t>Then the tree picture: "Just yes/no questions. You could draw this.</a:t>
+              <a:t>A7: X and y separated — "line 0 is setup, not magic."</a:t>
             </a:r>
           </a:p>
           <a:p>
@@ -1687,7 +1745,7 @@
               <a:rPr>
                 <a:latin typeface="Vazirmatn"/>
               </a:rPr>
-              <a:t>Who chose the questions? The machine did."</a:t>
+              <a:t>CEREMONY before fit(): "On three, everyone say LEARN."</a:t>
             </a:r>
           </a:p>
         </p:txBody>
@@ -1760,7 +1818,7 @@
               <a:rPr>
                 <a:latin typeface="Vazirmatn"/>
               </a:rPr>
-              <a:t>Slow, quiet, honest moment.</a:t>
+              <a:t>[RUN cell A8, students typing] Write the 3 lines LARGE on the board.</a:t>
             </a:r>
           </a:p>
           <a:p>
@@ -1768,7 +1826,7 @@
               <a:rPr>
                 <a:latin typeface="Vazirmatn"/>
               </a:rPr>
-              <a:t>SAY: "A mirror of 714 examples. Good data, good mirror. Unfair data, unfair mirror."</a:t>
+              <a:t>create = pick a student; fit = let it study; predict = ask, label hidden.</a:t>
             </a:r>
           </a:p>
           <a:p>
@@ -1776,7 +1834,7 @@
               <a:rPr>
                 <a:latin typeface="Vazirmatn"/>
               </a:rPr>
-              <a:t>Then snap energy back up for the quiz.</a:t>
+              <a:t>SAY: "Every model you'll ever meet follows these three lines."</a:t>
             </a:r>
           </a:p>
         </p:txBody>
@@ -1849,7 +1907,7 @@
               <a:rPr>
                 <a:latin typeface="Vazirmatn"/>
               </a:rPr>
-              <a:t>[50:00] CONSOLIDATION — cold call, friendly. One question per student:</a:t>
+              <a:t>[RUN cell A9] Predict for a volunteer: "Would Sara, 2nd class, age 13, survive?"</a:t>
             </a:r>
           </a:p>
           <a:p>
@@ -1857,7 +1915,7 @@
               <a:rPr>
                 <a:latin typeface="Vazirmatn"/>
               </a:rPr>
-              <a:t>get+produce? feature/label? 3 magic lines? why women survived?</a:t>
+              <a:t>Tree picture: "Your fruit map from 15 minutes ago? Same shape — the machine drew its own."</a:t>
             </a:r>
           </a:p>
           <a:p>
@@ -1865,7 +1923,7 @@
               <a:rPr>
                 <a:latin typeface="Vazirmatn"/>
               </a:rPr>
-              <a:t>If anyone stumbles on Q1-3, re-explain NOW.</a:t>
+              <a:t>Who chose the questions? The machine did — cliffhanger for Session 2.</a:t>
             </a:r>
           </a:p>
         </p:txBody>
@@ -1938,7 +1996,7 @@
               <a:rPr>
                 <a:latin typeface="Vazirmatn"/>
               </a:rPr>
-              <a:t>[55:00] THE SHIP + handout. Explain the loop OUT LOUD:</a:t>
+              <a:t>Slow, quiet, honest moment.</a:t>
             </a:r>
           </a:p>
           <a:p>
@@ -1946,7 +2004,7 @@
               <a:rPr>
                 <a:latin typeface="Vazirmatn"/>
               </a:rPr>
-              <a:t>4 problems tonight (20-30 min) = next session we solve them TOGETHER from YOUR attempts.</a:t>
+              <a:t>SAY: "A mirror of 712 examples. Good data, good mirror. Unfair data, unfair mirror."</a:t>
             </a:r>
           </a:p>
           <a:p>
@@ -1954,7 +2012,7 @@
               <a:rPr>
                 <a:latin typeface="Vazirmatn"/>
               </a:rPr>
-              <a:t>Judge: python judge/run.py s01_notebook.ipynb</a:t>
+              <a:t>Then snap energy back up for the quiz.</a:t>
             </a:r>
           </a:p>
         </p:txBody>
@@ -2027,7 +2085,7 @@
               <a:rPr>
                 <a:latin typeface="Vazirmatn"/>
               </a:rPr>
-              <a:t>One sentence of story per problem:</a:t>
+              <a:t>[50:00] CONSOLIDATION — cold call, friendly. One question per student:</a:t>
             </a:r>
           </a:p>
           <a:p>
@@ -2035,7 +2093,7 @@
               <a:rPr>
                 <a:latin typeface="Vazirmatn"/>
               </a:rPr>
-              <a:t>B1 dumb features under scrutiny; B2 invent your own dataset; B3 magic lines on YOUR data; B4 the 12-year-old boy verdict.</a:t>
+              <a:t>get+produce? feature/label? 3 magic lines? why women survived?</a:t>
             </a:r>
           </a:p>
           <a:p>
@@ -2043,7 +2101,7 @@
               <a:rPr>
                 <a:latin typeface="Vazirmatn"/>
               </a:rPr>
-              <a:t>Deadline: before the problem-solving session.</a:t>
+              <a:t>If anyone stumbles on Q1-3, re-explain NOW.</a:t>
             </a:r>
           </a:p>
         </p:txBody>
@@ -2116,6 +2174,184 @@
               <a:rPr>
                 <a:latin typeface="Vazirmatn"/>
               </a:rPr>
+              <a:t>[55:00] THE SHIP + handout. Explain the loop OUT LOUD:</a:t>
+            </a:r>
+          </a:p>
+          <a:p>
+            <a:r>
+              <a:rPr>
+                <a:latin typeface="Vazirmatn"/>
+              </a:rPr>
+              <a:t>4 problems tonight (20-30 min) = next session we solve them TOGETHER from YOUR attempts.</a:t>
+            </a:r>
+          </a:p>
+          <a:p>
+            <a:r>
+              <a:rPr>
+                <a:latin typeface="Vazirmatn"/>
+              </a:rPr>
+              <a:t>Judge: python judge/run.py s01_notebook.ipynb</a:t>
+            </a:r>
+          </a:p>
+        </p:txBody>
+      </p:sp>
+      <p:sp>
+        <p:nvSpPr>
+          <p:cNvPr id="4" name="Slide Number Placeholder 3"/>
+          <p:cNvSpPr>
+            <a:spLocks noGrp="1"/>
+          </p:cNvSpPr>
+          <p:nvPr>
+            <p:ph type="sldNum" idx="5" sz="quarter"/>
+          </p:nvPr>
+        </p:nvSpPr>
+        <p:spPr/>
+      </p:sp>
+    </p:spTree>
+  </p:cSld>
+  <p:clrMapOvr>
+    <a:masterClrMapping/>
+  </p:clrMapOvr>
+</p:notes>
+</file>
+
+<file path=ppt/notesSlides/notesSlide27.xml><?xml version="1.0" encoding="utf-8"?>
+<p:notes xmlns:a="http://schemas.openxmlformats.org/drawingml/2006/main" xmlns:p="http://schemas.openxmlformats.org/presentationml/2006/main" xmlns:r="http://schemas.openxmlformats.org/officeDocument/2006/relationships">
+  <p:cSld>
+    <p:spTree>
+      <p:nvGrpSpPr>
+        <p:cNvPr id="1" name=""/>
+        <p:cNvGrpSpPr/>
+        <p:nvPr/>
+      </p:nvGrpSpPr>
+      <p:grpSpPr>
+        <a:xfrm>
+          <a:off x="0" y="0"/>
+          <a:ext cx="0" cy="0"/>
+          <a:chOff x="0" y="0"/>
+          <a:chExt cx="0" cy="0"/>
+        </a:xfrm>
+      </p:grpSpPr>
+      <p:sp>
+        <p:nvSpPr>
+          <p:cNvPr id="2" name="Slide Image Placeholder 1"/>
+          <p:cNvSpPr>
+            <a:spLocks noGrp="1"/>
+          </p:cNvSpPr>
+          <p:nvPr>
+            <p:ph type="sldImg" idx="2"/>
+          </p:nvPr>
+        </p:nvSpPr>
+        <p:spPr/>
+      </p:sp>
+      <p:sp>
+        <p:nvSpPr>
+          <p:cNvPr id="3" name="Notes Placeholder 2"/>
+          <p:cNvSpPr>
+            <a:spLocks noGrp="1"/>
+          </p:cNvSpPr>
+          <p:nvPr>
+            <p:ph type="body" idx="3" sz="quarter"/>
+          </p:nvPr>
+        </p:nvSpPr>
+        <p:spPr/>
+        <p:txBody>
+          <a:bodyPr/>
+          <a:lstStyle/>
+          <a:p>
+            <a:r>
+              <a:rPr>
+                <a:latin typeface="Vazirmatn"/>
+              </a:rPr>
+              <a:t>One sentence of story per problem:</a:t>
+            </a:r>
+          </a:p>
+          <a:p>
+            <a:r>
+              <a:rPr>
+                <a:latin typeface="Vazirmatn"/>
+              </a:rPr>
+              <a:t>B1 dumb features under scrutiny; B2 invent your own dataset; B3 magic lines on YOUR data; B4 the 12-year-old boy verdict.</a:t>
+            </a:r>
+          </a:p>
+          <a:p>
+            <a:r>
+              <a:rPr>
+                <a:latin typeface="Vazirmatn"/>
+              </a:rPr>
+              <a:t>Deadline: before the problem-solving session. ~20-30 min total. First judge run is all-red — that's normal.</a:t>
+            </a:r>
+          </a:p>
+        </p:txBody>
+      </p:sp>
+      <p:sp>
+        <p:nvSpPr>
+          <p:cNvPr id="4" name="Slide Number Placeholder 3"/>
+          <p:cNvSpPr>
+            <a:spLocks noGrp="1"/>
+          </p:cNvSpPr>
+          <p:nvPr>
+            <p:ph type="sldNum" idx="5" sz="quarter"/>
+          </p:nvPr>
+        </p:nvSpPr>
+        <p:spPr/>
+      </p:sp>
+    </p:spTree>
+  </p:cSld>
+  <p:clrMapOvr>
+    <a:masterClrMapping/>
+  </p:clrMapOvr>
+</p:notes>
+</file>
+
+<file path=ppt/notesSlides/notesSlide28.xml><?xml version="1.0" encoding="utf-8"?>
+<p:notes xmlns:a="http://schemas.openxmlformats.org/drawingml/2006/main" xmlns:p="http://schemas.openxmlformats.org/presentationml/2006/main" xmlns:r="http://schemas.openxmlformats.org/officeDocument/2006/relationships">
+  <p:cSld>
+    <p:spTree>
+      <p:nvGrpSpPr>
+        <p:cNvPr id="1" name=""/>
+        <p:cNvGrpSpPr/>
+        <p:nvPr/>
+      </p:nvGrpSpPr>
+      <p:grpSpPr>
+        <a:xfrm>
+          <a:off x="0" y="0"/>
+          <a:ext cx="0" cy="0"/>
+          <a:chOff x="0" y="0"/>
+          <a:chExt cx="0" cy="0"/>
+        </a:xfrm>
+      </p:grpSpPr>
+      <p:sp>
+        <p:nvSpPr>
+          <p:cNvPr id="2" name="Slide Image Placeholder 1"/>
+          <p:cNvSpPr>
+            <a:spLocks noGrp="1"/>
+          </p:cNvSpPr>
+          <p:nvPr>
+            <p:ph type="sldImg" idx="2"/>
+          </p:nvPr>
+        </p:nvSpPr>
+        <p:spPr/>
+      </p:sp>
+      <p:sp>
+        <p:nvSpPr>
+          <p:cNvPr id="3" name="Notes Placeholder 2"/>
+          <p:cNvSpPr>
+            <a:spLocks noGrp="1"/>
+          </p:cNvSpPr>
+          <p:nvPr>
+            <p:ph type="body" idx="3" sz="quarter"/>
+          </p:nvPr>
+        </p:nvSpPr>
+        <p:spPr/>
+        <p:txBody>
+          <a:bodyPr/>
+          <a:lstStyle/>
+          <a:p>
+            <a:r>
+              <a:rPr>
+                <a:latin typeface="Vazirmatn"/>
+              </a:rPr>
               <a:t>[60:00 — end on time] "Tonight your repo goes live. Show your family: I built an AI today."</a:t>
             </a:r>
           </a:p>
@@ -2205,7 +2441,7 @@
               <a:rPr>
                 <a:latin typeface="Vazirmatn"/>
               </a:rPr>
-              <a:t>[RUN: PART 0 demo cell, stage 1] Show the 8-row table — this is ALL the machine sees.</a:t>
+              <a:t>[RUN: PART 0 demo cell — مرحلهٔ ۱, the «جدول» marker] The 8-row table is ALL the machine sees.</a:t>
             </a:r>
           </a:p>
           <a:p>
@@ -2294,7 +2530,7 @@
               <a:rPr>
                 <a:latin typeface="Vazirmatn"/>
               </a:rPr>
-              <a:t>[RUN: PART 0 demo cell, stage 3 — the scatter plot] The machine draws its own red dashed line.</a:t>
+              <a:t>[RUN: PART 0 demo cell — مرحلهٔ ۳, the «خطِ ماشین» marker] The scatter: the machine's own red dashed line.</a:t>
             </a:r>
           </a:p>
           <a:p>
@@ -2302,7 +2538,7 @@
               <a:rPr>
                 <a:latin typeface="Vazirmatn"/>
               </a:rPr>
-              <a:t>SAY: "No human drew this line. The machine found it in those 8 rows."</a:t>
+              <a:t>(مرحلهٔ ۲ was the silent .fit() — one invisible line of code.)</a:t>
             </a:r>
           </a:p>
           <a:p>
@@ -2310,7 +2546,15 @@
               <a:rPr>
                 <a:latin typeface="Vazirmatn"/>
               </a:rPr>
-              <a:t>EXPECT: "where did the line come from?!" — do NOT explain yet. Slide 9 answers it.</a:t>
+              <a:t>SAY: "No human drew this line. The machine found it hiding in those 8 rows."</a:t>
+            </a:r>
+          </a:p>
+          <a:p>
+            <a:r>
+              <a:rPr>
+                <a:latin typeface="Vazirmatn"/>
+              </a:rPr>
+              <a:t>EXPECT: "where did the line come from?!" — do NOT explain yet.</a:t>
             </a:r>
           </a:p>
         </p:txBody>
@@ -2383,7 +2627,7 @@
               <a:rPr>
                 <a:latin typeface="Vazirmatn"/>
               </a:rPr>
-              <a:t>[RUN: PART 0 demo cell, stage 4] Wolf right, neighbor cat right... PUPPY = cat (WRONG! it's a 2kg dog). ELEPHANT = dog (it only knows two words — laugh).</a:t>
+              <a:t>[RUN: PART 0 demo cell — مرحلهٔ ۴, the «امتحان با حیوانات ندیده» marker] Verdicts on unseen animals.</a:t>
             </a:r>
           </a:p>
           <a:p>
@@ -2391,7 +2635,7 @@
               <a:rPr>
                 <a:latin typeface="Vazirmatn"/>
               </a:rPr>
-              <a:t>THE MONEY MOMENT: "The line is a GUESS from 8 examples. Near the line, the guess breaks. More examples = better line — that's Session 2."</a:t>
+              <a:t>Let the puppy/elephant errors land as LAUGHS, then the cell prints the reveal: one question, weight ≤ 14 kg.</a:t>
             </a:r>
           </a:p>
           <a:p>
@@ -2399,7 +2643,15 @@
               <a:rPr>
                 <a:latin typeface="Vazirmatn"/>
               </a:rPr>
-              <a:t>CLOSING: "One idea behind all of this. You'll build your own before you leave today."</a:t>
+              <a:t>SAY: "It learned ONE question from 8 rows — and it still gets the puppy wrong. Learning is a guess."</a:t>
+            </a:r>
+          </a:p>
+          <a:p>
+            <a:r>
+              <a:rPr>
+                <a:latin typeface="Vazirmatn"/>
+              </a:rPr>
+              <a:t>SEED: "How does the machine pick that ONE question? Session 3 answers it — but first, Session 2."</a:t>
             </a:r>
           </a:p>
         </p:txBody>
@@ -2731,7 +2983,7 @@
               <a:rPr>
                 <a:latin typeface="Vazirmatn"/>
               </a:rPr>
-              <a:t>THE REVEAL — point back at the hook: those 8 animals WERE the examples with answers; the red line WAS the rule it discovered. The mystery is solved.</a:t>
+              <a:t>Board box 2 under box 1: data + answers = RULES — point silently.</a:t>
             </a:r>
           </a:p>
           <a:p>
@@ -2739,7 +2991,7 @@
               <a:rPr>
                 <a:latin typeface="Vazirmatn"/>
               </a:rPr>
-              <a:t>Board box 2 under box 1: data + answers = RULES.</a:t>
+              <a:t>REVEAL: the 8 animals WERE the examples; the red line WAS the rule.</a:t>
             </a:r>
           </a:p>
           <a:p>
@@ -2747,7 +2999,7 @@
               <a:rPr>
                 <a:latin typeface="Vazirmatn"/>
               </a:rPr>
-              <a:t>CHECK (cold call): "What does the machine get and produce?" — examples with answers = rules.</a:t>
+              <a:t>CHECK: "What does the machine get, what does it produce?"</a:t>
             </a:r>
           </a:p>
           <a:p>
@@ -2755,7 +3007,7 @@
               <a:rPr>
                 <a:latin typeface="Vazirmatn"/>
               </a:rPr>
-              <a:t>Point back to the red line at least 5 times today.</a:t>
+              <a:t>Return to the red line 5+ times today.</a:t>
             </a:r>
           </a:p>
         </p:txBody>
@@ -5757,7 +6009,7 @@
     <p:bg>
       <p:bgPr>
         <a:solidFill>
-          <a:srgbClr val="A9CCE8"/>
+          <a:srgbClr val="7DB6FF"/>
         </a:solidFill>
         <a:effectLst/>
       </p:bgPr>
@@ -5998,7 +6250,7 @@
                 </a:solidFill>
                 <a:latin typeface="Vazirmatn"/>
               </a:rPr>
-              <a:t>1 / 26</a:t>
+              <a:t>1 / 28</a:t>
             </a:r>
           </a:p>
         </p:txBody>
@@ -6017,7 +6269,7 @@
     <p:bg>
       <p:bgPr>
         <a:solidFill>
-          <a:srgbClr val="EDF4FB"/>
+          <a:srgbClr val="EAF3FE"/>
         </a:solidFill>
         <a:effectLst/>
       </p:bgPr>
@@ -6129,7 +6381,7 @@
                 </a:solidFill>
                 <a:latin typeface="Vazirmatn"/>
               </a:rPr>
-              <a:t>هوش مصنوعی یعنی آرزوی بزرگ: ماشین‌هایی که هوشمندانه رفتار می‌کنند</a:t>
+              <a:t>هوش مصنوعی (AI) = آرزوی بزرگ: ماشینِ هوشمند</a:t>
             </a:r>
           </a:p>
         </p:txBody>
@@ -6164,7 +6416,7 @@
                 </a:solidFill>
                 <a:latin typeface="Vazirmatn"/>
               </a:rPr>
-              <a:t>یادگیری ماشین یعنی راه اصلی رسیدن به آن آرزو: یادگیری از روی داده‌ها</a:t>
+              <a:t>یادگیری ماشین (ML) = راهِ رسیدن به آن آرزو: یادگیری از داده</a:t>
             </a:r>
           </a:p>
         </p:txBody>
@@ -6199,7 +6451,7 @@
                 </a:solidFill>
                 <a:latin typeface="Vazirmatn"/>
               </a:rPr>
-              <a:t>10 / 26</a:t>
+              <a:t>10 / 28</a:t>
             </a:r>
           </a:p>
         </p:txBody>
@@ -6218,7 +6470,7 @@
     <p:bg>
       <p:bgPr>
         <a:solidFill>
-          <a:srgbClr val="EDF4FB"/>
+          <a:srgbClr val="EAF3FE"/>
         </a:solidFill>
         <a:effectLst/>
       </p:bgPr>
@@ -6685,7 +6937,7 @@
                 </a:solidFill>
                 <a:latin typeface="Vazirmatn"/>
               </a:rPr>
-              <a:t>11 / 26</a:t>
+              <a:t>11 / 28</a:t>
             </a:r>
           </a:p>
         </p:txBody>
@@ -6704,7 +6956,7 @@
     <p:bg>
       <p:bgPr>
         <a:solidFill>
-          <a:srgbClr val="EDF4FB"/>
+          <a:srgbClr val="EAF3FE"/>
         </a:solidFill>
         <a:effectLst/>
       </p:bgPr>
@@ -6816,7 +7068,7 @@
                 </a:solidFill>
                 <a:latin typeface="Vazirmatn"/>
               </a:rPr>
-              <a:t>ویژگی = یک سرنخ (یک ستون)</a:t>
+              <a:t>ویژگی (Feature) = سرنخ (یک ستون)</a:t>
             </a:r>
           </a:p>
         </p:txBody>
@@ -6851,7 +7103,7 @@
                 </a:solidFill>
                 <a:latin typeface="Vazirmatn"/>
               </a:rPr>
-              <a:t>برچسب = پاسخ (ستونی که می‌خواهیم پیش‌بینی کنیم)</a:t>
+              <a:t>برچسب (Label) = پاسخ (ستونی که پیش‌بینی می‌کنیم)</a:t>
             </a:r>
           </a:p>
         </p:txBody>
@@ -6886,7 +7138,7 @@
                 </a:solidFill>
                 <a:latin typeface="Vazirmatn"/>
               </a:rPr>
-              <a:t>نمونه = یک سطر = سرنخ‌ها + پاسخ</a:t>
+              <a:t>نمونه (Example) = یک سطر = سرنخ‌ها + پاسخ</a:t>
             </a:r>
           </a:p>
         </p:txBody>
@@ -6921,7 +7173,7 @@
                 </a:solidFill>
                 <a:latin typeface="Vazirmatn"/>
               </a:rPr>
-              <a:t>12 / 26</a:t>
+              <a:t>12 / 28</a:t>
             </a:r>
           </a:p>
         </p:txBody>
@@ -6940,7 +7192,7 @@
     <p:bg>
       <p:bgPr>
         <a:solidFill>
-          <a:srgbClr val="EDF4FB"/>
+          <a:srgbClr val="EAF3FE"/>
         </a:solidFill>
         <a:effectLst/>
       </p:bgPr>
@@ -7157,7 +7409,7 @@
                 </a:solidFill>
                 <a:latin typeface="Vazirmatn"/>
               </a:rPr>
-              <a:t>13 / 26</a:t>
+              <a:t>13 / 28</a:t>
             </a:r>
           </a:p>
         </p:txBody>
@@ -7176,7 +7428,7 @@
     <p:bg>
       <p:bgPr>
         <a:solidFill>
-          <a:srgbClr val="EDF4FB"/>
+          <a:srgbClr val="EAF3FE"/>
         </a:solidFill>
         <a:effectLst/>
       </p:bgPr>
@@ -7253,7 +7505,7 @@
                 </a:solidFill>
                 <a:latin typeface="Vazirmatn"/>
               </a:rPr>
-              <a:t>یادگیری نظارت‌شده</a:t>
+              <a:t>سؤال‌های پشتِ سرِ هم</a:t>
             </a:r>
           </a:p>
         </p:txBody>
@@ -7288,7 +7540,7 @@
                 </a:solidFill>
                 <a:latin typeface="Vazirmatn"/>
               </a:rPr>
-              <a:t>یادگیری از نمونه‌هایی که پاسخ دارند.</a:t>
+              <a:t>حدس‌هایتان را به یک زنجیره بگذارید:</a:t>
             </a:r>
           </a:p>
         </p:txBody>
@@ -7323,7 +7575,7 @@
                 </a:solidFill>
                 <a:latin typeface="Vazirmatn"/>
               </a:rPr>
-              <a:t>مثل درس خواندن با پاسخ‌نامه —</a:t>
+              <a:t>اول رنگ را بپرس، بعد اندازه را.</a:t>
             </a:r>
           </a:p>
         </p:txBody>
@@ -7358,7 +7610,7 @@
                 </a:solidFill>
                 <a:latin typeface="Vazirmatn"/>
               </a:rPr>
-              <a:t>بعد رفتن سر آزمون جدید.</a:t>
+              <a:t>یک نقشهٔ تصمیم — با دست، بدون هیچ کدی.</a:t>
             </a:r>
           </a:p>
         </p:txBody>
@@ -7393,7 +7645,7 @@
                 </a:solidFill>
                 <a:latin typeface="Vazirmatn"/>
               </a:rPr>
-              <a:t>14 / 26</a:t>
+              <a:t>14 / 28</a:t>
             </a:r>
           </a:p>
         </p:txBody>
@@ -7412,7 +7664,7 @@
     <p:bg>
       <p:bgPr>
         <a:solidFill>
-          <a:srgbClr val="EDF4FB"/>
+          <a:srgbClr val="D2E6FF"/>
         </a:solidFill>
         <a:effectLst/>
       </p:bgPr>
@@ -7485,18 +7737,42 @@
             <a:r>
               <a:rPr sz="3400" b="1">
                 <a:solidFill>
-                  <a:srgbClr val="3C4043"/>
-                </a:solidFill>
-                <a:latin typeface="Vazirmatn"/>
-              </a:rPr>
-              <a:t>چرا «نظارت‌شده»؟</a:t>
-            </a:r>
-          </a:p>
-        </p:txBody>
-      </p:sp>
-      <p:sp>
-        <p:nvSpPr>
-          <p:cNvPr id="4" name="TextBox 3"/>
+                  <a:srgbClr val="1F6FEB"/>
+                </a:solidFill>
+                <a:latin typeface="Vazirmatn"/>
+              </a:rPr>
+              <a:t>نقشهٔ تصمیمِ میوه</a:t>
+            </a:r>
+          </a:p>
+        </p:txBody>
+      </p:sp>
+      <p:pic>
+        <p:nvPicPr>
+          <p:cNvPr id="4" name="Picture 3" descr="fruit_tree.png"/>
+          <p:cNvPicPr>
+            <a:picLocks noChangeAspect="1"/>
+          </p:cNvPicPr>
+          <p:nvPr/>
+        </p:nvPicPr>
+        <p:blipFill>
+          <a:blip r:embed="rId2"/>
+          <a:stretch>
+            <a:fillRect/>
+          </a:stretch>
+        </p:blipFill>
+        <p:spPr>
+          <a:xfrm>
+            <a:off x="2730855" y="1005840"/>
+            <a:ext cx="6729984" cy="4206240"/>
+          </a:xfrm>
+          <a:prstGeom prst="rect">
+            <a:avLst/>
+          </a:prstGeom>
+        </p:spPr>
+      </p:pic>
+      <p:sp>
+        <p:nvSpPr>
+          <p:cNvPr id="5" name="TextBox 4"/>
           <p:cNvSpPr txBox="1"/>
           <p:nvPr/>
         </p:nvSpPr>
@@ -7524,42 +7800,7 @@
                 </a:solidFill>
                 <a:latin typeface="Vazirmatn"/>
               </a:rPr>
-              <a:t>هیچ انسانی مدل را تماشا نمی‌کند!</a:t>
-            </a:r>
-          </a:p>
-        </p:txBody>
-      </p:sp>
-      <p:sp>
-        <p:nvSpPr>
-          <p:cNvPr id="5" name="TextBox 4"/>
-          <p:cNvSpPr txBox="1"/>
-          <p:nvPr/>
-        </p:nvSpPr>
-        <p:spPr>
-          <a:xfrm>
-            <a:off x="731520" y="1965960"/>
-            <a:ext cx="10728655" cy="640080"/>
-          </a:xfrm>
-          <a:prstGeom prst="rect">
-            <a:avLst/>
-          </a:prstGeom>
-          <a:noFill/>
-        </p:spPr>
-        <p:txBody>
-          <a:bodyPr wrap="square">
-            <a:spAutoFit/>
-          </a:bodyPr>
-          <a:lstStyle/>
-          <a:p>
-            <a:pPr algn="r" rtl="1"/>
-            <a:r>
-              <a:rPr sz="1800">
-                <a:solidFill>
-                  <a:srgbClr val="3C4043"/>
-                </a:solidFill>
-                <a:latin typeface="Vazirmatn"/>
-              </a:rPr>
-              <a:t>یعنی داده‌ها پاسخ دارند.</a:t>
+              <a:t>همان حدس‌های خودتان — فقط مرتب شده.</a:t>
             </a:r>
           </a:p>
         </p:txBody>
@@ -7567,41 +7808,6 @@
       <p:sp>
         <p:nvSpPr>
           <p:cNvPr id="6" name="TextBox 5"/>
-          <p:cNvSpPr txBox="1"/>
-          <p:nvPr/>
-        </p:nvSpPr>
-        <p:spPr>
-          <a:xfrm>
-            <a:off x="731520" y="2468880"/>
-            <a:ext cx="10728655" cy="640080"/>
-          </a:xfrm>
-          <a:prstGeom prst="rect">
-            <a:avLst/>
-          </a:prstGeom>
-          <a:noFill/>
-        </p:spPr>
-        <p:txBody>
-          <a:bodyPr wrap="square">
-            <a:spAutoFit/>
-          </a:bodyPr>
-          <a:lstStyle/>
-          <a:p>
-            <a:pPr algn="r" rtl="1"/>
-            <a:r>
-              <a:rPr sz="1800">
-                <a:solidFill>
-                  <a:srgbClr val="3C4043"/>
-                </a:solidFill>
-                <a:latin typeface="Vazirmatn"/>
-              </a:rPr>
-              <a:t>(تاریخ یک کلمهٔ عجیب انتخاب کرده. )</a:t>
-            </a:r>
-          </a:p>
-        </p:txBody>
-      </p:sp>
-      <p:sp>
-        <p:nvSpPr>
-          <p:cNvPr id="7" name="TextBox 6"/>
           <p:cNvSpPr txBox="1"/>
           <p:nvPr/>
         </p:nvSpPr>
@@ -7629,7 +7835,7 @@
                 </a:solidFill>
                 <a:latin typeface="Vazirmatn"/>
               </a:rPr>
-              <a:t>15 / 26</a:t>
+              <a:t>15 / 28</a:t>
             </a:r>
           </a:p>
         </p:txBody>
@@ -7648,7 +7854,7 @@
     <p:bg>
       <p:bgPr>
         <a:solidFill>
-          <a:srgbClr val="EDF4FB"/>
+          <a:srgbClr val="EAF3FE"/>
         </a:solidFill>
         <a:effectLst/>
       </p:bgPr>
@@ -7725,7 +7931,7 @@
                 </a:solidFill>
                 <a:latin typeface="Vazirmatn"/>
               </a:rPr>
-              <a:t>تایتانیک</a:t>
+              <a:t>یادگیری نظارت‌شده (Supervised Learning)</a:t>
             </a:r>
           </a:p>
         </p:txBody>
@@ -7760,14 +7966,14 @@
                 </a:solidFill>
                 <a:latin typeface="Vazirmatn"/>
               </a:rPr>
-              <a:t>۸۹۱ مسافر، ۸۹۱ سطر.</a:t>
+              <a:t>یادگیری از نمونه‌هایی که پاسخ دارند.</a:t>
             </a:r>
           </a:p>
         </p:txBody>
       </p:sp>
       <p:pic>
         <p:nvPicPr>
-          <p:cNvPr id="5" name="Picture 4" descr="titanic_ship.png"/>
+          <p:cNvPr id="5" name="Picture 4" descr="supervised_study_exam.png"/>
           <p:cNvPicPr>
             <a:picLocks noChangeAspect="1"/>
           </p:cNvPicPr>
@@ -7781,8 +7987,8 @@
         </p:blipFill>
         <p:spPr>
           <a:xfrm>
-            <a:off x="3291687" y="1005840"/>
-            <a:ext cx="5608320" cy="4206240"/>
+            <a:off x="2346808" y="1005840"/>
+            <a:ext cx="7498078" cy="3208014"/>
           </a:xfrm>
           <a:prstGeom prst="rect">
             <a:avLst/>
@@ -7792,76 +7998,6 @@
       <p:sp>
         <p:nvSpPr>
           <p:cNvPr id="6" name="TextBox 5"/>
-          <p:cNvSpPr txBox="1"/>
-          <p:nvPr/>
-        </p:nvSpPr>
-        <p:spPr>
-          <a:xfrm>
-            <a:off x="731520" y="1965960"/>
-            <a:ext cx="10728655" cy="640080"/>
-          </a:xfrm>
-          <a:prstGeom prst="rect">
-            <a:avLst/>
-          </a:prstGeom>
-          <a:noFill/>
-        </p:spPr>
-        <p:txBody>
-          <a:bodyPr wrap="square">
-            <a:spAutoFit/>
-          </a:bodyPr>
-          <a:lstStyle/>
-          <a:p>
-            <a:pPr algn="r" rtl="1"/>
-            <a:r>
-              <a:rPr sz="1800">
-                <a:solidFill>
-                  <a:srgbClr val="3C4043"/>
-                </a:solidFill>
-                <a:latin typeface="Vazirmatn"/>
-              </a:rPr>
-              <a:t>هر سطر، یک زندگی است؛ هر ستون، یک سرنخ.</a:t>
-            </a:r>
-          </a:p>
-        </p:txBody>
-      </p:sp>
-      <p:sp>
-        <p:nvSpPr>
-          <p:cNvPr id="7" name="TextBox 6"/>
-          <p:cNvSpPr txBox="1"/>
-          <p:nvPr/>
-        </p:nvSpPr>
-        <p:spPr>
-          <a:xfrm>
-            <a:off x="731520" y="2468880"/>
-            <a:ext cx="10728655" cy="640080"/>
-          </a:xfrm>
-          <a:prstGeom prst="rect">
-            <a:avLst/>
-          </a:prstGeom>
-          <a:noFill/>
-        </p:spPr>
-        <p:txBody>
-          <a:bodyPr wrap="square">
-            <a:spAutoFit/>
-          </a:bodyPr>
-          <a:lstStyle/>
-          <a:p>
-            <a:pPr algn="r" rtl="1"/>
-            <a:r>
-              <a:rPr sz="1800">
-                <a:solidFill>
-                  <a:srgbClr val="3C4043"/>
-                </a:solidFill>
-                <a:latin typeface="Vazirmatn"/>
-              </a:rPr>
-              <a:t>اگر جای آن‌ها بودی، زنده می‌ماندی؟</a:t>
-            </a:r>
-          </a:p>
-        </p:txBody>
-      </p:sp>
-      <p:sp>
-        <p:nvSpPr>
-          <p:cNvPr id="8" name="TextBox 7"/>
           <p:cNvSpPr txBox="1"/>
           <p:nvPr/>
         </p:nvSpPr>
@@ -7889,7 +8025,7 @@
                 </a:solidFill>
                 <a:latin typeface="Vazirmatn"/>
               </a:rPr>
-              <a:t>16 / 26</a:t>
+              <a:t>16 / 28</a:t>
             </a:r>
           </a:p>
         </p:txBody>
@@ -7908,7 +8044,7 @@
     <p:bg>
       <p:bgPr>
         <a:solidFill>
-          <a:srgbClr val="EDF4FB"/>
+          <a:srgbClr val="EAF3FE"/>
         </a:solidFill>
         <a:effectLst/>
       </p:bgPr>
@@ -7985,38 +8121,14 @@
                 </a:solidFill>
                 <a:latin typeface="Vazirmatn"/>
               </a:rPr>
-              <a:t>داده به‌صورت عکس</a:t>
-            </a:r>
-          </a:p>
-        </p:txBody>
-      </p:sp>
-      <p:pic>
-        <p:nvPicPr>
-          <p:cNvPr id="4" name="Picture 3" descr="survival_counts.png"/>
-          <p:cNvPicPr>
-            <a:picLocks noChangeAspect="1"/>
-          </p:cNvPicPr>
-          <p:nvPr/>
-        </p:nvPicPr>
-        <p:blipFill>
-          <a:blip r:embed="rId2"/>
-          <a:stretch>
-            <a:fillRect/>
-          </a:stretch>
-        </p:blipFill>
-        <p:spPr>
-          <a:xfrm>
-            <a:off x="2776178" y="1005840"/>
-            <a:ext cx="6639339" cy="4206240"/>
-          </a:xfrm>
-          <a:prstGeom prst="rect">
-            <a:avLst/>
-          </a:prstGeom>
-        </p:spPr>
-      </p:pic>
-      <p:sp>
-        <p:nvSpPr>
-          <p:cNvPr id="5" name="TextBox 4"/>
+              <a:t>چرا «نظارت‌شده»؟</a:t>
+            </a:r>
+          </a:p>
+        </p:txBody>
+      </p:sp>
+      <p:sp>
+        <p:nvSpPr>
+          <p:cNvPr id="4" name="TextBox 3"/>
           <p:cNvSpPr txBox="1"/>
           <p:nvPr/>
         </p:nvSpPr>
@@ -8044,7 +8156,42 @@
                 </a:solidFill>
                 <a:latin typeface="Vazirmatn"/>
               </a:rPr>
-              <a:t>همیشه قبل از هر کاری، داده‌ات را ببین.</a:t>
+              <a:t>هیچ انسانی مدل را تماشا نمی‌کند!</a:t>
+            </a:r>
+          </a:p>
+        </p:txBody>
+      </p:sp>
+      <p:sp>
+        <p:nvSpPr>
+          <p:cNvPr id="5" name="TextBox 4"/>
+          <p:cNvSpPr txBox="1"/>
+          <p:nvPr/>
+        </p:nvSpPr>
+        <p:spPr>
+          <a:xfrm>
+            <a:off x="731520" y="1965960"/>
+            <a:ext cx="10728655" cy="640080"/>
+          </a:xfrm>
+          <a:prstGeom prst="rect">
+            <a:avLst/>
+          </a:prstGeom>
+          <a:noFill/>
+        </p:spPr>
+        <p:txBody>
+          <a:bodyPr wrap="square">
+            <a:spAutoFit/>
+          </a:bodyPr>
+          <a:lstStyle/>
+          <a:p>
+            <a:pPr algn="r" rtl="1"/>
+            <a:r>
+              <a:rPr sz="1800">
+                <a:solidFill>
+                  <a:srgbClr val="3C4043"/>
+                </a:solidFill>
+                <a:latin typeface="Vazirmatn"/>
+              </a:rPr>
+              <a:t>یعنی داده‌ها پاسخ دارند.</a:t>
             </a:r>
           </a:p>
         </p:txBody>
@@ -8052,6 +8199,41 @@
       <p:sp>
         <p:nvSpPr>
           <p:cNvPr id="6" name="TextBox 5"/>
+          <p:cNvSpPr txBox="1"/>
+          <p:nvPr/>
+        </p:nvSpPr>
+        <p:spPr>
+          <a:xfrm>
+            <a:off x="731520" y="2468880"/>
+            <a:ext cx="10728655" cy="640080"/>
+          </a:xfrm>
+          <a:prstGeom prst="rect">
+            <a:avLst/>
+          </a:prstGeom>
+          <a:noFill/>
+        </p:spPr>
+        <p:txBody>
+          <a:bodyPr wrap="square">
+            <a:spAutoFit/>
+          </a:bodyPr>
+          <a:lstStyle/>
+          <a:p>
+            <a:pPr algn="r" rtl="1"/>
+            <a:r>
+              <a:rPr sz="1800">
+                <a:solidFill>
+                  <a:srgbClr val="3C4043"/>
+                </a:solidFill>
+                <a:latin typeface="Vazirmatn"/>
+              </a:rPr>
+              <a:t>(تاریخ یک کلمهٔ عجیب انتخاب کرده. )</a:t>
+            </a:r>
+          </a:p>
+        </p:txBody>
+      </p:sp>
+      <p:sp>
+        <p:nvSpPr>
+          <p:cNvPr id="7" name="TextBox 6"/>
           <p:cNvSpPr txBox="1"/>
           <p:nvPr/>
         </p:nvSpPr>
@@ -8079,7 +8261,7 @@
                 </a:solidFill>
                 <a:latin typeface="Vazirmatn"/>
               </a:rPr>
-              <a:t>17 / 26</a:t>
+              <a:t>17 / 28</a:t>
             </a:r>
           </a:p>
         </p:txBody>
@@ -8098,7 +8280,7 @@
     <p:bg>
       <p:bgPr>
         <a:solidFill>
-          <a:srgbClr val="DCEBF8"/>
+          <a:srgbClr val="EAF3FE"/>
         </a:solidFill>
         <a:effectLst/>
       </p:bgPr>
@@ -8171,18 +8353,53 @@
             <a:r>
               <a:rPr sz="3400" b="1">
                 <a:solidFill>
-                  <a:srgbClr val="2B6CB0"/>
-                </a:solidFill>
-                <a:latin typeface="Vazirmatn"/>
-              </a:rPr>
-              <a:t>بقا بر حسب جنسیت و کلاس</a:t>
+                  <a:srgbClr val="3C4043"/>
+                </a:solidFill>
+                <a:latin typeface="Vazirmatn"/>
+              </a:rPr>
+              <a:t>تایتانیک</a:t>
+            </a:r>
+          </a:p>
+        </p:txBody>
+      </p:sp>
+      <p:sp>
+        <p:nvSpPr>
+          <p:cNvPr id="4" name="TextBox 3"/>
+          <p:cNvSpPr txBox="1"/>
+          <p:nvPr/>
+        </p:nvSpPr>
+        <p:spPr>
+          <a:xfrm>
+            <a:off x="731520" y="1463040"/>
+            <a:ext cx="10728655" cy="640080"/>
+          </a:xfrm>
+          <a:prstGeom prst="rect">
+            <a:avLst/>
+          </a:prstGeom>
+          <a:noFill/>
+        </p:spPr>
+        <p:txBody>
+          <a:bodyPr wrap="square">
+            <a:spAutoFit/>
+          </a:bodyPr>
+          <a:lstStyle/>
+          <a:p>
+            <a:pPr algn="r" rtl="1"/>
+            <a:r>
+              <a:rPr sz="1800">
+                <a:solidFill>
+                  <a:srgbClr val="3C4043"/>
+                </a:solidFill>
+                <a:latin typeface="Vazirmatn"/>
+              </a:rPr>
+              <a:t>۸۹۱ مسافر، ۸۹۱ سطر.</a:t>
             </a:r>
           </a:p>
         </p:txBody>
       </p:sp>
       <p:pic>
         <p:nvPicPr>
-          <p:cNvPr id="4" name="Picture 3" descr="survival_by_sex_class.png"/>
+          <p:cNvPr id="5" name="Picture 4" descr="titanic_ship.png"/>
           <p:cNvPicPr>
             <a:picLocks noChangeAspect="1"/>
           </p:cNvPicPr>
@@ -8196,8 +8413,8 @@
         </p:blipFill>
         <p:spPr>
           <a:xfrm>
-            <a:off x="2346808" y="1005840"/>
-            <a:ext cx="7498079" cy="2462604"/>
+            <a:off x="3291687" y="1005840"/>
+            <a:ext cx="5608320" cy="4206240"/>
           </a:xfrm>
           <a:prstGeom prst="rect">
             <a:avLst/>
@@ -8206,13 +8423,13 @@
       </p:pic>
       <p:sp>
         <p:nvSpPr>
-          <p:cNvPr id="5" name="TextBox 4"/>
-          <p:cNvSpPr txBox="1"/>
-          <p:nvPr/>
-        </p:nvSpPr>
-        <p:spPr>
-          <a:xfrm>
-            <a:off x="731520" y="1463040"/>
+          <p:cNvPr id="6" name="TextBox 5"/>
+          <p:cNvSpPr txBox="1"/>
+          <p:nvPr/>
+        </p:nvSpPr>
+        <p:spPr>
+          <a:xfrm>
+            <a:off x="731520" y="1965960"/>
             <a:ext cx="10728655" cy="640080"/>
           </a:xfrm>
           <a:prstGeom prst="rect">
@@ -8234,14 +8451,49 @@
                 </a:solidFill>
                 <a:latin typeface="Vazirmatn"/>
               </a:rPr>
-              <a:t>حدود ۷۴٪ زنان زنده ماندند؛ اما فقط ۱۹٪ از مردان کلاس ۳.</a:t>
-            </a:r>
-          </a:p>
-        </p:txBody>
-      </p:sp>
-      <p:sp>
-        <p:nvSpPr>
-          <p:cNvPr id="6" name="TextBox 5"/>
+              <a:t>هر سطر، یک زندگی است؛ هر ستون، یک سرنخ.</a:t>
+            </a:r>
+          </a:p>
+        </p:txBody>
+      </p:sp>
+      <p:sp>
+        <p:nvSpPr>
+          <p:cNvPr id="7" name="TextBox 6"/>
+          <p:cNvSpPr txBox="1"/>
+          <p:nvPr/>
+        </p:nvSpPr>
+        <p:spPr>
+          <a:xfrm>
+            <a:off x="731520" y="2468880"/>
+            <a:ext cx="10728655" cy="640080"/>
+          </a:xfrm>
+          <a:prstGeom prst="rect">
+            <a:avLst/>
+          </a:prstGeom>
+          <a:noFill/>
+        </p:spPr>
+        <p:txBody>
+          <a:bodyPr wrap="square">
+            <a:spAutoFit/>
+          </a:bodyPr>
+          <a:lstStyle/>
+          <a:p>
+            <a:pPr algn="r" rtl="1"/>
+            <a:r>
+              <a:rPr sz="1800">
+                <a:solidFill>
+                  <a:srgbClr val="3C4043"/>
+                </a:solidFill>
+                <a:latin typeface="Vazirmatn"/>
+              </a:rPr>
+              <a:t>اگر جای آن‌ها بودی، زنده می‌ماندی؟</a:t>
+            </a:r>
+          </a:p>
+        </p:txBody>
+      </p:sp>
+      <p:sp>
+        <p:nvSpPr>
+          <p:cNvPr id="8" name="TextBox 7"/>
           <p:cNvSpPr txBox="1"/>
           <p:nvPr/>
         </p:nvSpPr>
@@ -8269,7 +8521,7 @@
                 </a:solidFill>
                 <a:latin typeface="Vazirmatn"/>
               </a:rPr>
-              <a:t>18 / 26</a:t>
+              <a:t>18 / 28</a:t>
             </a:r>
           </a:p>
         </p:txBody>
@@ -8288,7 +8540,7 @@
     <p:bg>
       <p:bgPr>
         <a:solidFill>
-          <a:srgbClr val="EDF4FB"/>
+          <a:srgbClr val="EAF3FE"/>
         </a:solidFill>
         <a:effectLst/>
       </p:bgPr>
@@ -8361,53 +8613,18 @@
             <a:r>
               <a:rPr sz="3400" b="1">
                 <a:solidFill>
-                  <a:srgbClr val="2B6CB0"/>
-                </a:solidFill>
-                <a:latin typeface="Vazirmatn"/>
-              </a:rPr>
-              <a:t>لحظهٔ جادویی</a:t>
-            </a:r>
-          </a:p>
-        </p:txBody>
-      </p:sp>
-      <p:sp>
-        <p:nvSpPr>
-          <p:cNvPr id="4" name="TextBox 3"/>
-          <p:cNvSpPr txBox="1"/>
-          <p:nvPr/>
-        </p:nvSpPr>
-        <p:spPr>
-          <a:xfrm>
-            <a:off x="731520" y="1463040"/>
-            <a:ext cx="10728655" cy="640080"/>
-          </a:xfrm>
-          <a:prstGeom prst="rect">
-            <a:avLst/>
-          </a:prstGeom>
-          <a:noFill/>
-        </p:spPr>
-        <p:txBody>
-          <a:bodyPr wrap="square">
-            <a:spAutoFit/>
-          </a:bodyPr>
-          <a:lstStyle/>
-          <a:p>
-            <a:pPr algn="r" rtl="1"/>
-            <a:r>
-              <a:rPr sz="1800">
-                <a:solidFill>
-                  <a:srgbClr val="3C4043"/>
-                </a:solidFill>
-                <a:latin typeface="Vazirmatn"/>
-              </a:rPr>
-              <a:t>در ۳ خط، یک هوش مصنوعی بساز</a:t>
+                  <a:srgbClr val="3C4043"/>
+                </a:solidFill>
+                <a:latin typeface="Vazirmatn"/>
+              </a:rPr>
+              <a:t>داده به‌صورت عکس</a:t>
             </a:r>
           </a:p>
         </p:txBody>
       </p:sp>
       <p:pic>
         <p:nvPicPr>
-          <p:cNvPr id="5" name="Picture 4" descr="magic_lines.png"/>
+          <p:cNvPr id="4" name="Picture 3" descr="survival_counts.png"/>
           <p:cNvPicPr>
             <a:picLocks noChangeAspect="1"/>
           </p:cNvPicPr>
@@ -8421,8 +8638,8 @@
         </p:blipFill>
         <p:spPr>
           <a:xfrm>
-            <a:off x="3291687" y="1005840"/>
-            <a:ext cx="5608320" cy="4206240"/>
+            <a:off x="2455832" y="1005840"/>
+            <a:ext cx="7280030" cy="4206240"/>
           </a:xfrm>
           <a:prstGeom prst="rect">
             <a:avLst/>
@@ -8431,42 +8648,42 @@
       </p:pic>
       <p:sp>
         <p:nvSpPr>
+          <p:cNvPr id="5" name="TextBox 4"/>
+          <p:cNvSpPr txBox="1"/>
+          <p:nvPr/>
+        </p:nvSpPr>
+        <p:spPr>
+          <a:xfrm>
+            <a:off x="731520" y="1463040"/>
+            <a:ext cx="10728655" cy="640080"/>
+          </a:xfrm>
+          <a:prstGeom prst="rect">
+            <a:avLst/>
+          </a:prstGeom>
+          <a:noFill/>
+        </p:spPr>
+        <p:txBody>
+          <a:bodyPr wrap="square">
+            <a:spAutoFit/>
+          </a:bodyPr>
+          <a:lstStyle/>
+          <a:p>
+            <a:pPr algn="r" rtl="1"/>
+            <a:r>
+              <a:rPr sz="1800">
+                <a:solidFill>
+                  <a:srgbClr val="3C4043"/>
+                </a:solidFill>
+                <a:latin typeface="Vazirmatn"/>
+              </a:rPr>
+              <a:t>همیشه قبل از هر کاری، داده‌ات را ببین.</a:t>
+            </a:r>
+          </a:p>
+        </p:txBody>
+      </p:sp>
+      <p:sp>
+        <p:nvSpPr>
           <p:cNvPr id="6" name="TextBox 5"/>
-          <p:cNvSpPr txBox="1"/>
-          <p:nvPr/>
-        </p:nvSpPr>
-        <p:spPr>
-          <a:xfrm>
-            <a:off x="731520" y="1965960"/>
-            <a:ext cx="10728655" cy="640080"/>
-          </a:xfrm>
-          <a:prstGeom prst="rect">
-            <a:avLst/>
-          </a:prstGeom>
-          <a:noFill/>
-        </p:spPr>
-        <p:txBody>
-          <a:bodyPr wrap="square">
-            <a:spAutoFit/>
-          </a:bodyPr>
-          <a:lstStyle/>
-          <a:p>
-            <a:pPr algn="r" rtl="1"/>
-            <a:r>
-              <a:rPr sz="1800">
-                <a:solidFill>
-                  <a:srgbClr val="3C4043"/>
-                </a:solidFill>
-                <a:latin typeface="Vazirmatn"/>
-              </a:rPr>
-              <a:t>با من تایپ کن. واقعاً — نت‌بوک را باز کن و تایپ کن.</a:t>
-            </a:r>
-          </a:p>
-        </p:txBody>
-      </p:sp>
-      <p:sp>
-        <p:nvSpPr>
-          <p:cNvPr id="7" name="TextBox 6"/>
           <p:cNvSpPr txBox="1"/>
           <p:nvPr/>
         </p:nvSpPr>
@@ -8494,7 +8711,7 @@
                 </a:solidFill>
                 <a:latin typeface="Vazirmatn"/>
               </a:rPr>
-              <a:t>19 / 26</a:t>
+              <a:t>19 / 28</a:t>
             </a:r>
           </a:p>
         </p:txBody>
@@ -8513,7 +8730,7 @@
     <p:bg>
       <p:bgPr>
         <a:solidFill>
-          <a:srgbClr val="EDF4FB"/>
+          <a:srgbClr val="EAF3FE"/>
         </a:solidFill>
         <a:effectLst/>
       </p:bgPr>
@@ -8586,7 +8803,7 @@
             <a:r>
               <a:rPr sz="3400" b="1">
                 <a:solidFill>
-                  <a:srgbClr val="2B6CB0"/>
+                  <a:srgbClr val="1F6FEB"/>
                 </a:solidFill>
                 <a:latin typeface="Vazirmatn"/>
               </a:rPr>
@@ -8621,11 +8838,11 @@
             <a:r>
               <a:rPr sz="3400" b="1">
                 <a:solidFill>
-                  <a:srgbClr val="2B6CB0"/>
-                </a:solidFill>
-                <a:latin typeface="Vazirmatn"/>
-              </a:rPr>
-              <a:t>یک دمو. یک خط. یک سؤال.</a:t>
+                  <a:srgbClr val="1F6FEB"/>
+                </a:solidFill>
+                <a:latin typeface="Vazirmatn"/>
+              </a:rPr>
+              <a:t>یک دمو. یک خطِ قرمز. یک سؤال.</a:t>
             </a:r>
           </a:p>
         </p:txBody>
@@ -8695,7 +8912,7 @@
                 </a:solidFill>
                 <a:latin typeface="Vazirmatn"/>
               </a:rPr>
-              <a:t>2 / 26</a:t>
+              <a:t>2 / 28</a:t>
             </a:r>
           </a:p>
         </p:txBody>
@@ -8714,7 +8931,7 @@
     <p:bg>
       <p:bgPr>
         <a:solidFill>
-          <a:srgbClr val="DCEBF8"/>
+          <a:srgbClr val="D2E6FF"/>
         </a:solidFill>
         <a:effectLst/>
       </p:bgPr>
@@ -8787,18 +9004,77 @@
             <a:r>
               <a:rPr sz="3400" b="1">
                 <a:solidFill>
-                  <a:srgbClr val="2B6CB0"/>
-                </a:solidFill>
-                <a:latin typeface="Vazirmatn"/>
-              </a:rPr>
-              <a:t>سه خط جادویی</a:t>
-            </a:r>
-          </a:p>
-        </p:txBody>
-      </p:sp>
-      <p:sp>
-        <p:nvSpPr>
-          <p:cNvPr id="4" name="TextBox 3"/>
+                  <a:srgbClr val="1F6FEB"/>
+                </a:solidFill>
+                <a:latin typeface="Vazirmatn"/>
+              </a:rPr>
+              <a:t>بقا بر حسب جنسیت و کلاس</a:t>
+            </a:r>
+          </a:p>
+        </p:txBody>
+      </p:sp>
+      <p:pic>
+        <p:nvPicPr>
+          <p:cNvPr id="4" name="Picture 3" descr="survival_by_sex_class.png"/>
+          <p:cNvPicPr>
+            <a:picLocks noChangeAspect="1"/>
+          </p:cNvPicPr>
+          <p:nvPr/>
+        </p:nvPicPr>
+        <p:blipFill>
+          <a:blip r:embed="rId2"/>
+          <a:stretch>
+            <a:fillRect/>
+          </a:stretch>
+        </p:blipFill>
+        <p:spPr>
+          <a:xfrm>
+            <a:off x="2346808" y="1005840"/>
+            <a:ext cx="7498079" cy="2999231"/>
+          </a:xfrm>
+          <a:prstGeom prst="rect">
+            <a:avLst/>
+          </a:prstGeom>
+        </p:spPr>
+      </p:pic>
+      <p:sp>
+        <p:nvSpPr>
+          <p:cNvPr id="5" name="TextBox 4"/>
+          <p:cNvSpPr txBox="1"/>
+          <p:nvPr/>
+        </p:nvSpPr>
+        <p:spPr>
+          <a:xfrm>
+            <a:off x="731520" y="1463040"/>
+            <a:ext cx="10728655" cy="640080"/>
+          </a:xfrm>
+          <a:prstGeom prst="rect">
+            <a:avLst/>
+          </a:prstGeom>
+          <a:noFill/>
+        </p:spPr>
+        <p:txBody>
+          <a:bodyPr wrap="square">
+            <a:spAutoFit/>
+          </a:bodyPr>
+          <a:lstStyle/>
+          <a:p>
+            <a:pPr algn="r" rtl="1"/>
+            <a:r>
+              <a:rPr sz="1800">
+                <a:solidFill>
+                  <a:srgbClr val="3C4043"/>
+                </a:solidFill>
+                <a:latin typeface="Vazirmatn"/>
+              </a:rPr>
+              <a:t>حدود ۷۵٪ زنان زنده ماندند؛ اما فقط ۲۰٪ از مردان.</a:t>
+            </a:r>
+          </a:p>
+        </p:txBody>
+      </p:sp>
+      <p:sp>
+        <p:nvSpPr>
+          <p:cNvPr id="6" name="TextBox 5"/>
           <p:cNvSpPr txBox="1"/>
           <p:nvPr/>
         </p:nvSpPr>
@@ -8826,7 +9102,7 @@
                 </a:solidFill>
                 <a:latin typeface="Vazirmatn"/>
               </a:rPr>
-              <a:t>20 / 26</a:t>
+              <a:t>20 / 28</a:t>
             </a:r>
           </a:p>
         </p:txBody>
@@ -8845,7 +9121,7 @@
     <p:bg>
       <p:bgPr>
         <a:solidFill>
-          <a:srgbClr val="EDF4FB"/>
+          <a:srgbClr val="EAF3FE"/>
         </a:solidFill>
         <a:effectLst/>
       </p:bgPr>
@@ -8901,6 +9177,41 @@
         <p:spPr>
           <a:xfrm>
             <a:off x="731520" y="457200"/>
+            <a:ext cx="10728655" cy="1097280"/>
+          </a:xfrm>
+          <a:prstGeom prst="rect">
+            <a:avLst/>
+          </a:prstGeom>
+          <a:noFill/>
+        </p:spPr>
+        <p:txBody>
+          <a:bodyPr wrap="square">
+            <a:spAutoFit/>
+          </a:bodyPr>
+          <a:lstStyle/>
+          <a:p>
+            <a:pPr algn="r" rtl="1"/>
+            <a:r>
+              <a:rPr sz="3400" b="1">
+                <a:solidFill>
+                  <a:srgbClr val="1F6FEB"/>
+                </a:solidFill>
+                <a:latin typeface="Vazirmatn"/>
+              </a:rPr>
+              <a:t>لحظهٔ جادویی</a:t>
+            </a:r>
+          </a:p>
+        </p:txBody>
+      </p:sp>
+      <p:sp>
+        <p:nvSpPr>
+          <p:cNvPr id="4" name="TextBox 3"/>
+          <p:cNvSpPr txBox="1"/>
+          <p:nvPr/>
+        </p:nvSpPr>
+        <p:spPr>
+          <a:xfrm>
+            <a:off x="731520" y="1463040"/>
             <a:ext cx="10728655" cy="640080"/>
           </a:xfrm>
           <a:prstGeom prst="rect">
@@ -8922,14 +9233,14 @@
                 </a:solidFill>
                 <a:latin typeface="Vazirmatn"/>
               </a:rPr>
-              <a:t>چه چیزی یاد گرفت؟</a:t>
+              <a:t>در ۳ خط، یک هوش مصنوعی بساز</a:t>
             </a:r>
           </a:p>
         </p:txBody>
       </p:sp>
       <p:pic>
         <p:nvPicPr>
-          <p:cNvPr id="4" name="Picture 3" descr="decision_tree.png"/>
+          <p:cNvPr id="5" name="Picture 4" descr="magic_lines.png"/>
           <p:cNvPicPr>
             <a:picLocks noChangeAspect="1"/>
           </p:cNvPicPr>
@@ -8943,8 +9254,8 @@
         </p:blipFill>
         <p:spPr>
           <a:xfrm>
-            <a:off x="2346808" y="1005840"/>
-            <a:ext cx="7498079" cy="3949931"/>
+            <a:off x="3291687" y="1005840"/>
+            <a:ext cx="5608320" cy="4206240"/>
           </a:xfrm>
           <a:prstGeom prst="rect">
             <a:avLst/>
@@ -8953,13 +9264,13 @@
       </p:pic>
       <p:sp>
         <p:nvSpPr>
-          <p:cNvPr id="5" name="TextBox 4"/>
-          <p:cNvSpPr txBox="1"/>
-          <p:nvPr/>
-        </p:nvSpPr>
-        <p:spPr>
-          <a:xfrm>
-            <a:off x="731520" y="960120"/>
+          <p:cNvPr id="6" name="TextBox 5"/>
+          <p:cNvSpPr txBox="1"/>
+          <p:nvPr/>
+        </p:nvSpPr>
+        <p:spPr>
+          <a:xfrm>
+            <a:off x="731520" y="1965960"/>
             <a:ext cx="10728655" cy="640080"/>
           </a:xfrm>
           <a:prstGeom prst="rect">
@@ -8981,14 +9292,14 @@
                 </a:solidFill>
                 <a:latin typeface="Vazirmatn"/>
               </a:rPr>
-              <a:t>همان طور که می‌بینی فقط چند سؤال ساده است؛ حتی خودت هم می‌توانستی بکشیش.</a:t>
-            </a:r>
-          </a:p>
-        </p:txBody>
-      </p:sp>
-      <p:sp>
-        <p:nvSpPr>
-          <p:cNvPr id="6" name="TextBox 5"/>
+              <a:t>با من تایپ کن. واقعاً — نت‌بوک را باز کن و تایپ کن.</a:t>
+            </a:r>
+          </a:p>
+        </p:txBody>
+      </p:sp>
+      <p:sp>
+        <p:nvSpPr>
+          <p:cNvPr id="7" name="TextBox 6"/>
           <p:cNvSpPr txBox="1"/>
           <p:nvPr/>
         </p:nvSpPr>
@@ -9016,7 +9327,7 @@
                 </a:solidFill>
                 <a:latin typeface="Vazirmatn"/>
               </a:rPr>
-              <a:t>21 / 26</a:t>
+              <a:t>21 / 28</a:t>
             </a:r>
           </a:p>
         </p:txBody>
@@ -9035,7 +9346,7 @@
     <p:bg>
       <p:bgPr>
         <a:solidFill>
-          <a:srgbClr val="E3E9F0"/>
+          <a:srgbClr val="D2E6FF"/>
         </a:solidFill>
         <a:effectLst/>
       </p:bgPr>
@@ -9091,7 +9402,7 @@
         <p:spPr>
           <a:xfrm>
             <a:off x="731520" y="457200"/>
-            <a:ext cx="10728655" cy="640080"/>
+            <a:ext cx="10728655" cy="1097280"/>
           </a:xfrm>
           <a:prstGeom prst="rect">
             <a:avLst/>
@@ -9106,13 +9417,13 @@
           <a:p>
             <a:pPr algn="r" rtl="1"/>
             <a:r>
-              <a:rPr sz="1800">
-                <a:solidFill>
-                  <a:srgbClr val="3C4043"/>
-                </a:solidFill>
-                <a:latin typeface="Vazirmatn"/>
-              </a:rPr>
-              <a:t>یک حرف آخر</a:t>
+              <a:rPr sz="3400" b="1">
+                <a:solidFill>
+                  <a:srgbClr val="1F6FEB"/>
+                </a:solidFill>
+                <a:latin typeface="Vazirmatn"/>
+              </a:rPr>
+              <a:t>سه خط جادویی</a:t>
             </a:r>
           </a:p>
         </p:txBody>
@@ -9120,111 +9431,6 @@
       <p:sp>
         <p:nvSpPr>
           <p:cNvPr id="4" name="TextBox 3"/>
-          <p:cNvSpPr txBox="1"/>
-          <p:nvPr/>
-        </p:nvSpPr>
-        <p:spPr>
-          <a:xfrm>
-            <a:off x="731520" y="960120"/>
-            <a:ext cx="10728655" cy="640080"/>
-          </a:xfrm>
-          <a:prstGeom prst="rect">
-            <a:avLst/>
-          </a:prstGeom>
-          <a:noFill/>
-        </p:spPr>
-        <p:txBody>
-          <a:bodyPr wrap="square">
-            <a:spAutoFit/>
-          </a:bodyPr>
-          <a:lstStyle/>
-          <a:p>
-            <a:pPr algn="r" rtl="1"/>
-            <a:r>
-              <a:rPr sz="1800">
-                <a:solidFill>
-                  <a:srgbClr val="3C4043"/>
-                </a:solidFill>
-                <a:latin typeface="Vazirmatn"/>
-              </a:rPr>
-              <a:t>این مدل یک مغز نیست.</a:t>
-            </a:r>
-          </a:p>
-        </p:txBody>
-      </p:sp>
-      <p:sp>
-        <p:nvSpPr>
-          <p:cNvPr id="5" name="TextBox 4"/>
-          <p:cNvSpPr txBox="1"/>
-          <p:nvPr/>
-        </p:nvSpPr>
-        <p:spPr>
-          <a:xfrm>
-            <a:off x="731520" y="1463040"/>
-            <a:ext cx="10728655" cy="640080"/>
-          </a:xfrm>
-          <a:prstGeom prst="rect">
-            <a:avLst/>
-          </a:prstGeom>
-          <a:noFill/>
-        </p:spPr>
-        <p:txBody>
-          <a:bodyPr wrap="square">
-            <a:spAutoFit/>
-          </a:bodyPr>
-          <a:lstStyle/>
-          <a:p>
-            <a:pPr algn="r" rtl="1"/>
-            <a:r>
-              <a:rPr sz="1800">
-                <a:solidFill>
-                  <a:srgbClr val="3C4043"/>
-                </a:solidFill>
-                <a:latin typeface="Vazirmatn"/>
-              </a:rPr>
-              <a:t>فقط الگویی از سؤال‌ها پیدا کرده که با بقا جور در می‌آید.</a:t>
-            </a:r>
-          </a:p>
-        </p:txBody>
-      </p:sp>
-      <p:sp>
-        <p:nvSpPr>
-          <p:cNvPr id="6" name="TextBox 5"/>
-          <p:cNvSpPr txBox="1"/>
-          <p:nvPr/>
-        </p:nvSpPr>
-        <p:spPr>
-          <a:xfrm>
-            <a:off x="731520" y="1965960"/>
-            <a:ext cx="10728655" cy="640080"/>
-          </a:xfrm>
-          <a:prstGeom prst="rect">
-            <a:avLst/>
-          </a:prstGeom>
-          <a:noFill/>
-        </p:spPr>
-        <p:txBody>
-          <a:bodyPr wrap="square">
-            <a:spAutoFit/>
-          </a:bodyPr>
-          <a:lstStyle/>
-          <a:p>
-            <a:pPr algn="r" rtl="1"/>
-            <a:r>
-              <a:rPr sz="1800">
-                <a:solidFill>
-                  <a:srgbClr val="3C4043"/>
-                </a:solidFill>
-                <a:latin typeface="Vazirmatn"/>
-              </a:rPr>
-              <a:t>و همین، خودش شگفت‌انگیز است.</a:t>
-            </a:r>
-          </a:p>
-        </p:txBody>
-      </p:sp>
-      <p:sp>
-        <p:nvSpPr>
-          <p:cNvPr id="7" name="TextBox 6"/>
           <p:cNvSpPr txBox="1"/>
           <p:nvPr/>
         </p:nvSpPr>
@@ -9252,7 +9458,7 @@
                 </a:solidFill>
                 <a:latin typeface="Vazirmatn"/>
               </a:rPr>
-              <a:t>22 / 26</a:t>
+              <a:t>22 / 28</a:t>
             </a:r>
           </a:p>
         </p:txBody>
@@ -9271,7 +9477,7 @@
     <p:bg>
       <p:bgPr>
         <a:solidFill>
-          <a:srgbClr val="EDF4FB"/>
+          <a:srgbClr val="EAF3FE"/>
         </a:solidFill>
         <a:effectLst/>
       </p:bgPr>
@@ -9318,9 +9524,44 @@
           </a:p>
         </p:txBody>
       </p:sp>
+      <p:sp>
+        <p:nvSpPr>
+          <p:cNvPr id="3" name="TextBox 2"/>
+          <p:cNvSpPr txBox="1"/>
+          <p:nvPr/>
+        </p:nvSpPr>
+        <p:spPr>
+          <a:xfrm>
+            <a:off x="731520" y="457200"/>
+            <a:ext cx="10728655" cy="1097280"/>
+          </a:xfrm>
+          <a:prstGeom prst="rect">
+            <a:avLst/>
+          </a:prstGeom>
+          <a:noFill/>
+        </p:spPr>
+        <p:txBody>
+          <a:bodyPr wrap="square">
+            <a:spAutoFit/>
+          </a:bodyPr>
+          <a:lstStyle/>
+          <a:p>
+            <a:pPr algn="r" rtl="1"/>
+            <a:r>
+              <a:rPr sz="3400" b="1">
+                <a:solidFill>
+                  <a:srgbClr val="3C4043"/>
+                </a:solidFill>
+                <a:latin typeface="Vazirmatn"/>
+              </a:rPr>
+              <a:t>چه چیزی یاد گرفت؟</a:t>
+            </a:r>
+          </a:p>
+        </p:txBody>
+      </p:sp>
       <p:pic>
         <p:nvPicPr>
-          <p:cNvPr id="3" name="Picture 2" descr="shared_band.png"/>
+          <p:cNvPr id="4" name="Picture 3" descr="decision_tree.png"/>
           <p:cNvPicPr>
             <a:picLocks noChangeAspect="1"/>
           </p:cNvPicPr>
@@ -9335,7 +9576,7 @@
         <p:spPr>
           <a:xfrm>
             <a:off x="2346808" y="1005840"/>
-            <a:ext cx="7498079" cy="1874519"/>
+            <a:ext cx="7498079" cy="3949931"/>
           </a:xfrm>
           <a:prstGeom prst="rect">
             <a:avLst/>
@@ -9344,14 +9585,14 @@
       </p:pic>
       <p:sp>
         <p:nvSpPr>
-          <p:cNvPr id="4" name="TextBox 3"/>
-          <p:cNvSpPr txBox="1"/>
-          <p:nvPr/>
-        </p:nvSpPr>
-        <p:spPr>
-          <a:xfrm>
-            <a:off x="731520" y="457200"/>
-            <a:ext cx="10728655" cy="1097280"/>
+          <p:cNvPr id="5" name="TextBox 4"/>
+          <p:cNvSpPr txBox="1"/>
+          <p:nvPr/>
+        </p:nvSpPr>
+        <p:spPr>
+          <a:xfrm>
+            <a:off x="731520" y="1463040"/>
+            <a:ext cx="10728655" cy="640080"/>
           </a:xfrm>
           <a:prstGeom prst="rect">
             <a:avLst/>
@@ -9366,48 +9607,13 @@
           <a:p>
             <a:pPr algn="r" rtl="1"/>
             <a:r>
-              <a:rPr sz="3400" b="1">
-                <a:solidFill>
-                  <a:srgbClr val="3C4043"/>
-                </a:solidFill>
-                <a:latin typeface="Vazirmatn"/>
-              </a:rPr>
-              <a:t>امروز یاد گرفتی</a:t>
-            </a:r>
-          </a:p>
-        </p:txBody>
-      </p:sp>
-      <p:sp>
-        <p:nvSpPr>
-          <p:cNvPr id="5" name="TextBox 4"/>
-          <p:cNvSpPr txBox="1"/>
-          <p:nvPr/>
-        </p:nvSpPr>
-        <p:spPr>
-          <a:xfrm>
-            <a:off x="731520" y="1463040"/>
-            <a:ext cx="10728655" cy="502920"/>
-          </a:xfrm>
-          <a:prstGeom prst="rect">
-            <a:avLst/>
-          </a:prstGeom>
-          <a:noFill/>
-        </p:spPr>
-        <p:txBody>
-          <a:bodyPr wrap="square">
-            <a:spAutoFit/>
-          </a:bodyPr>
-          <a:lstStyle/>
-          <a:p>
-            <a:pPr algn="r" rtl="1"/>
-            <a:r>
-              <a:rPr sz="1900">
-                <a:solidFill>
-                  <a:srgbClr val="3C4043"/>
-                </a:solidFill>
-                <a:latin typeface="Vazirmatn"/>
-              </a:rPr>
-              <a:t>• قاعده ← پاسخ، یا پاسخ ← قاعده</a:t>
+              <a:rPr sz="1800">
+                <a:solidFill>
+                  <a:srgbClr val="3C4043"/>
+                </a:solidFill>
+                <a:latin typeface="Vazirmatn"/>
+              </a:rPr>
+              <a:t>همان طور که می‌بینی فقط چند سؤال ساده است؛ حتی خودت هم می‌توانستی بکشیش.</a:t>
             </a:r>
           </a:p>
         </p:txBody>
@@ -9415,111 +9621,6 @@
       <p:sp>
         <p:nvSpPr>
           <p:cNvPr id="6" name="TextBox 5"/>
-          <p:cNvSpPr txBox="1"/>
-          <p:nvPr/>
-        </p:nvSpPr>
-        <p:spPr>
-          <a:xfrm>
-            <a:off x="731520" y="1874520"/>
-            <a:ext cx="10728655" cy="502920"/>
-          </a:xfrm>
-          <a:prstGeom prst="rect">
-            <a:avLst/>
-          </a:prstGeom>
-          <a:noFill/>
-        </p:spPr>
-        <p:txBody>
-          <a:bodyPr wrap="square">
-            <a:spAutoFit/>
-          </a:bodyPr>
-          <a:lstStyle/>
-          <a:p>
-            <a:pPr algn="r" rtl="1"/>
-            <a:r>
-              <a:rPr sz="1900">
-                <a:solidFill>
-                  <a:srgbClr val="3C4043"/>
-                </a:solidFill>
-                <a:latin typeface="Vazirmatn"/>
-              </a:rPr>
-              <a:t>• ویژگی (سرنخ) و برچسب (پاسخ)</a:t>
-            </a:r>
-          </a:p>
-        </p:txBody>
-      </p:sp>
-      <p:sp>
-        <p:nvSpPr>
-          <p:cNvPr id="7" name="TextBox 6"/>
-          <p:cNvSpPr txBox="1"/>
-          <p:nvPr/>
-        </p:nvSpPr>
-        <p:spPr>
-          <a:xfrm>
-            <a:off x="731520" y="2286000"/>
-            <a:ext cx="10728655" cy="502920"/>
-          </a:xfrm>
-          <a:prstGeom prst="rect">
-            <a:avLst/>
-          </a:prstGeom>
-          <a:noFill/>
-        </p:spPr>
-        <p:txBody>
-          <a:bodyPr wrap="square">
-            <a:spAutoFit/>
-          </a:bodyPr>
-          <a:lstStyle/>
-          <a:p>
-            <a:pPr algn="r" rtl="1"/>
-            <a:r>
-              <a:rPr sz="1900">
-                <a:solidFill>
-                  <a:srgbClr val="3C4043"/>
-                </a:solidFill>
-                <a:latin typeface="Vazirmatn"/>
-              </a:rPr>
-              <a:t>• یادگیری نظارت‌شده = نمونه‌های همراه با پاسخ</a:t>
-            </a:r>
-          </a:p>
-        </p:txBody>
-      </p:sp>
-      <p:sp>
-        <p:nvSpPr>
-          <p:cNvPr id="8" name="TextBox 7"/>
-          <p:cNvSpPr txBox="1"/>
-          <p:nvPr/>
-        </p:nvSpPr>
-        <p:spPr>
-          <a:xfrm>
-            <a:off x="731520" y="2697480"/>
-            <a:ext cx="10728655" cy="502920"/>
-          </a:xfrm>
-          <a:prstGeom prst="rect">
-            <a:avLst/>
-          </a:prstGeom>
-          <a:noFill/>
-        </p:spPr>
-        <p:txBody>
-          <a:bodyPr wrap="square">
-            <a:spAutoFit/>
-          </a:bodyPr>
-          <a:lstStyle/>
-          <a:p>
-            <a:pPr algn="r" rtl="1"/>
-            <a:r>
-              <a:rPr sz="1900">
-                <a:solidFill>
-                  <a:srgbClr val="3C4043"/>
-                </a:solidFill>
-                <a:latin typeface="Vazirmatn"/>
-              </a:rPr>
-              <a:t>• سه خط جادویی: بساز ← یاد بده ← پیش‌بینی کن</a:t>
-            </a:r>
-          </a:p>
-        </p:txBody>
-      </p:sp>
-      <p:sp>
-        <p:nvSpPr>
-          <p:cNvPr id="9" name="TextBox 8"/>
           <p:cNvSpPr txBox="1"/>
           <p:nvPr/>
         </p:nvSpPr>
@@ -9547,7 +9648,7 @@
                 </a:solidFill>
                 <a:latin typeface="Vazirmatn"/>
               </a:rPr>
-              <a:t>23 / 26</a:t>
+              <a:t>23 / 28</a:t>
             </a:r>
           </a:p>
         </p:txBody>
@@ -9566,7 +9667,7 @@
     <p:bg>
       <p:bgPr>
         <a:solidFill>
-          <a:srgbClr val="EDF4FB"/>
+          <a:srgbClr val="DCE9FB"/>
         </a:solidFill>
         <a:effectLst/>
       </p:bgPr>
@@ -9639,11 +9740,11 @@
             <a:r>
               <a:rPr sz="3400" b="1">
                 <a:solidFill>
-                  <a:srgbClr val="3C4043"/>
-                </a:solidFill>
-                <a:latin typeface="Vazirmatn"/>
-              </a:rPr>
-              <a:t>تحویل امشب</a:t>
+                  <a:srgbClr val="1A3A66"/>
+                </a:solidFill>
+                <a:latin typeface="Vazirmatn"/>
+              </a:rPr>
+              <a:t>یک حرف آخر</a:t>
             </a:r>
           </a:p>
         </p:txBody>
@@ -9678,7 +9779,7 @@
                 </a:solidFill>
                 <a:latin typeface="Vazirmatn"/>
               </a:rPr>
-              <a:t>اولین نت‌بوک یادگیری ماشین‌ات ← مخزن گیت‌هاب تو</a:t>
+              <a:t>این مدل یک مغز نیست.</a:t>
             </a:r>
           </a:p>
         </p:txBody>
@@ -9713,7 +9814,7 @@
                 </a:solidFill>
                 <a:latin typeface="Vazirmatn"/>
               </a:rPr>
-              <a:t>«اگر آن روز سرِ تایتانیک بودم، زنده می‌ماندم؟» — مدلی که خودت ساختی جواب می‌دهد</a:t>
+              <a:t>فقط الگویی از سؤال‌ها پیدا کرده که با بقا جور در می‌آید.</a:t>
             </a:r>
           </a:p>
         </p:txBody>
@@ -9721,6 +9822,41 @@
       <p:sp>
         <p:nvSpPr>
           <p:cNvPr id="6" name="TextBox 5"/>
+          <p:cNvSpPr txBox="1"/>
+          <p:nvPr/>
+        </p:nvSpPr>
+        <p:spPr>
+          <a:xfrm>
+            <a:off x="731520" y="2468880"/>
+            <a:ext cx="10728655" cy="640080"/>
+          </a:xfrm>
+          <a:prstGeom prst="rect">
+            <a:avLst/>
+          </a:prstGeom>
+          <a:noFill/>
+        </p:spPr>
+        <p:txBody>
+          <a:bodyPr wrap="square">
+            <a:spAutoFit/>
+          </a:bodyPr>
+          <a:lstStyle/>
+          <a:p>
+            <a:pPr algn="r" rtl="1"/>
+            <a:r>
+              <a:rPr sz="1800">
+                <a:solidFill>
+                  <a:srgbClr val="3C4043"/>
+                </a:solidFill>
+                <a:latin typeface="Vazirmatn"/>
+              </a:rPr>
+              <a:t>و همین، خودش شگفت‌انگیز است.</a:t>
+            </a:r>
+          </a:p>
+        </p:txBody>
+      </p:sp>
+      <p:sp>
+        <p:nvSpPr>
+          <p:cNvPr id="7" name="TextBox 6"/>
           <p:cNvSpPr txBox="1"/>
           <p:nvPr/>
         </p:nvSpPr>
@@ -9748,7 +9884,7 @@
                 </a:solidFill>
                 <a:latin typeface="Vazirmatn"/>
               </a:rPr>
-              <a:t>24 / 26</a:t>
+              <a:t>24 / 28</a:t>
             </a:r>
           </a:p>
         </p:txBody>
@@ -9767,7 +9903,7 @@
     <p:bg>
       <p:bgPr>
         <a:solidFill>
-          <a:srgbClr val="EDF4FB"/>
+          <a:srgbClr val="EAF3FE"/>
         </a:solidFill>
         <a:effectLst/>
       </p:bgPr>
@@ -9814,9 +9950,33 @@
           </a:p>
         </p:txBody>
       </p:sp>
-      <p:sp>
-        <p:nvSpPr>
-          <p:cNvPr id="3" name="TextBox 2"/>
+      <p:pic>
+        <p:nvPicPr>
+          <p:cNvPr id="3" name="Picture 2" descr="shared_band.png"/>
+          <p:cNvPicPr>
+            <a:picLocks noChangeAspect="1"/>
+          </p:cNvPicPr>
+          <p:nvPr/>
+        </p:nvPicPr>
+        <p:blipFill>
+          <a:blip r:embed="rId2"/>
+          <a:stretch>
+            <a:fillRect/>
+          </a:stretch>
+        </p:blipFill>
+        <p:spPr>
+          <a:xfrm>
+            <a:off x="2346808" y="1005840"/>
+            <a:ext cx="7498079" cy="1874519"/>
+          </a:xfrm>
+          <a:prstGeom prst="rect">
+            <a:avLst/>
+          </a:prstGeom>
+        </p:spPr>
+      </p:pic>
+      <p:sp>
+        <p:nvSpPr>
+          <p:cNvPr id="4" name="TextBox 3"/>
           <p:cNvSpPr txBox="1"/>
           <p:nvPr/>
         </p:nvSpPr>
@@ -9844,14 +10004,14 @@
                 </a:solidFill>
                 <a:latin typeface="Vazirmatn"/>
               </a:rPr>
-              <a:t>تمرین‌های خانه (۴ تا)</a:t>
-            </a:r>
-          </a:p>
-        </p:txBody>
-      </p:sp>
-      <p:sp>
-        <p:nvSpPr>
-          <p:cNvPr id="4" name="TextBox 3"/>
+              <a:t>امروز یاد گرفتی</a:t>
+            </a:r>
+          </a:p>
+        </p:txBody>
+      </p:sp>
+      <p:sp>
+        <p:nvSpPr>
+          <p:cNvPr id="5" name="TextBox 4"/>
           <p:cNvSpPr txBox="1"/>
           <p:nvPr/>
         </p:nvSpPr>
@@ -9879,14 +10039,14 @@
                 </a:solidFill>
                 <a:latin typeface="Vazirmatn"/>
               </a:rPr>
-              <a:t>• B1 کارآگاه ویژگی‌ها</a:t>
-            </a:r>
-          </a:p>
-        </p:txBody>
-      </p:sp>
-      <p:sp>
-        <p:nvSpPr>
-          <p:cNvPr id="5" name="TextBox 4"/>
+              <a:t>• قاعده ← پاسخ، یا پاسخ ← قاعده</a:t>
+            </a:r>
+          </a:p>
+        </p:txBody>
+      </p:sp>
+      <p:sp>
+        <p:nvSpPr>
+          <p:cNvPr id="6" name="TextBox 5"/>
           <p:cNvSpPr txBox="1"/>
           <p:nvPr/>
         </p:nvSpPr>
@@ -9914,14 +10074,14 @@
                 </a:solidFill>
                 <a:latin typeface="Vazirmatn"/>
               </a:rPr>
-              <a:t>• B2 دیتاست خودت را بساز</a:t>
-            </a:r>
-          </a:p>
-        </p:txBody>
-      </p:sp>
-      <p:sp>
-        <p:nvSpPr>
-          <p:cNvPr id="6" name="TextBox 5"/>
+              <a:t>• ویژگی (سرنخ) و برچسب (پاسخ)</a:t>
+            </a:r>
+          </a:p>
+        </p:txBody>
+      </p:sp>
+      <p:sp>
+        <p:nvSpPr>
+          <p:cNvPr id="7" name="TextBox 6"/>
           <p:cNvSpPr txBox="1"/>
           <p:nvPr/>
         </p:nvSpPr>
@@ -9949,14 +10109,14 @@
                 </a:solidFill>
                 <a:latin typeface="Vazirmatn"/>
               </a:rPr>
-              <a:t>• B3 سه خط جادویی — طبقه‌بند حیوانات خودت</a:t>
-            </a:r>
-          </a:p>
-        </p:txBody>
-      </p:sp>
-      <p:sp>
-        <p:nvSpPr>
-          <p:cNvPr id="7" name="TextBox 6"/>
+              <a:t>• یادگیری نظارت‌شده = نمونه‌های همراه با پاسخ</a:t>
+            </a:r>
+          </a:p>
+        </p:txBody>
+      </p:sp>
+      <p:sp>
+        <p:nvSpPr>
+          <p:cNvPr id="8" name="TextBox 7"/>
           <p:cNvSpPr txBox="1"/>
           <p:nvPr/>
         </p:nvSpPr>
@@ -9984,42 +10144,7 @@
                 </a:solidFill>
                 <a:latin typeface="Vazirmatn"/>
               </a:rPr>
-              <a:t>• B4 پیش‌بینی‌گر بقا</a:t>
-            </a:r>
-          </a:p>
-        </p:txBody>
-      </p:sp>
-      <p:sp>
-        <p:nvSpPr>
-          <p:cNvPr id="8" name="TextBox 7"/>
-          <p:cNvSpPr txBox="1"/>
-          <p:nvPr/>
-        </p:nvSpPr>
-        <p:spPr>
-          <a:xfrm>
-            <a:off x="731520" y="3108960"/>
-            <a:ext cx="10728655" cy="640080"/>
-          </a:xfrm>
-          <a:prstGeom prst="rect">
-            <a:avLst/>
-          </a:prstGeom>
-          <a:noFill/>
-        </p:spPr>
-        <p:txBody>
-          <a:bodyPr wrap="square">
-            <a:spAutoFit/>
-          </a:bodyPr>
-          <a:lstStyle/>
-          <a:p>
-            <a:pPr algn="r" rtl="1"/>
-            <a:r>
-              <a:rPr sz="1800">
-                <a:solidFill>
-                  <a:srgbClr val="3C4043"/>
-                </a:solidFill>
-                <a:latin typeface="Vazirmatn"/>
-              </a:rPr>
-              <a:t>مهلت: قبل از جلسهٔ بعدی (حل مسئله).</a:t>
+              <a:t>• سه خط جادویی: بساز ← یاد بده ← پیش‌بینی کن</a:t>
             </a:r>
           </a:p>
         </p:txBody>
@@ -10054,7 +10179,7 @@
                 </a:solidFill>
                 <a:latin typeface="Vazirmatn"/>
               </a:rPr>
-              <a:t>25 / 26</a:t>
+              <a:t>25 / 28</a:t>
             </a:r>
           </a:p>
         </p:txBody>
@@ -10073,7 +10198,7 @@
     <p:bg>
       <p:bgPr>
         <a:solidFill>
-          <a:srgbClr val="A9CCE8"/>
+          <a:srgbClr val="EAF3FE"/>
         </a:solidFill>
         <a:effectLst/>
       </p:bgPr>
@@ -10144,13 +10269,13 @@
           <a:p>
             <a:pPr algn="r" rtl="1"/>
             <a:r>
-              <a:rPr sz="4000" b="1">
-                <a:solidFill>
-                  <a:srgbClr val="3C4043"/>
-                </a:solidFill>
-                <a:latin typeface="Vazirmatn"/>
-              </a:rPr>
-              <a:t>جلسهٔ بعد</a:t>
+              <a:rPr sz="3400" b="1">
+                <a:solidFill>
+                  <a:srgbClr val="3C4043"/>
+                </a:solidFill>
+                <a:latin typeface="Vazirmatn"/>
+              </a:rPr>
+              <a:t>تحویل امشب</a:t>
             </a:r>
           </a:p>
         </p:txBody>
@@ -10185,7 +10310,7 @@
                 </a:solidFill>
                 <a:latin typeface="Vazirmatn"/>
               </a:rPr>
-              <a:t>تمرین‌هایتان را همان‌جا، با هم حل می‌کنیم.</a:t>
+              <a:t>اولین نت‌بوک یادگیری ماشین‌ات ← مخزن گیت‌هاب تو</a:t>
             </a:r>
           </a:p>
         </p:txBody>
@@ -10220,7 +10345,7 @@
                 </a:solidFill>
                 <a:latin typeface="Vazirmatn"/>
               </a:rPr>
-              <a:t>هر کاری که امتحان کردید را بیاورید؛ حتی کدهای خراب را.</a:t>
+              <a:t>«اگر آن روز سرِ تایتانیک بودم، زنده می‌ماندم؟» — مدلی که خودت ساختی جواب می‌دهد</a:t>
             </a:r>
           </a:p>
         </p:txBody>
@@ -10233,7 +10358,278 @@
         </p:nvSpPr>
         <p:spPr>
           <a:xfrm>
-            <a:off x="731520" y="2468880"/>
+            <a:off x="274320" y="6400800"/>
+            <a:ext cx="1097280" cy="320040"/>
+          </a:xfrm>
+          <a:prstGeom prst="rect">
+            <a:avLst/>
+          </a:prstGeom>
+          <a:noFill/>
+        </p:spPr>
+        <p:txBody>
+          <a:bodyPr wrap="none">
+            <a:spAutoFit/>
+          </a:bodyPr>
+          <a:lstStyle/>
+          <a:p>
+            <a:pPr algn="l"/>
+            <a:r>
+              <a:rPr sz="1200">
+                <a:solidFill>
+                  <a:srgbClr val="3C4043"/>
+                </a:solidFill>
+                <a:latin typeface="Vazirmatn"/>
+              </a:rPr>
+              <a:t>26 / 28</a:t>
+            </a:r>
+          </a:p>
+        </p:txBody>
+      </p:sp>
+    </p:spTree>
+  </p:cSld>
+  <p:clrMapOvr>
+    <a:masterClrMapping/>
+  </p:clrMapOvr>
+</p:sld>
+</file>
+
+<file path=ppt/slides/slide27.xml><?xml version="1.0" encoding="utf-8"?>
+<p:sld xmlns:a="http://schemas.openxmlformats.org/drawingml/2006/main" xmlns:p="http://schemas.openxmlformats.org/presentationml/2006/main" xmlns:r="http://schemas.openxmlformats.org/officeDocument/2006/relationships">
+  <p:cSld>
+    <p:bg>
+      <p:bgPr>
+        <a:solidFill>
+          <a:srgbClr val="EAF3FE"/>
+        </a:solidFill>
+        <a:effectLst/>
+      </p:bgPr>
+    </p:bg>
+    <p:spTree>
+      <p:nvGrpSpPr>
+        <p:cNvPr id="1" name=""/>
+        <p:cNvGrpSpPr/>
+        <p:nvPr/>
+      </p:nvGrpSpPr>
+      <p:grpSpPr/>
+      <p:sp>
+        <p:nvSpPr>
+          <p:cNvPr id="2" name="TextBox 1"/>
+          <p:cNvSpPr txBox="1"/>
+          <p:nvPr/>
+        </p:nvSpPr>
+        <p:spPr>
+          <a:xfrm>
+            <a:off x="502920" y="164592"/>
+            <a:ext cx="3200400" cy="274320"/>
+          </a:xfrm>
+          <a:prstGeom prst="rect">
+            <a:avLst/>
+          </a:prstGeom>
+          <a:noFill/>
+        </p:spPr>
+        <p:txBody>
+          <a:bodyPr wrap="none">
+            <a:spAutoFit/>
+          </a:bodyPr>
+          <a:lstStyle/>
+          <a:p>
+            <a:pPr algn="r" rtl="1"/>
+            <a:r>
+              <a:rPr sz="1100">
+                <a:solidFill>
+                  <a:srgbClr val="3C4043"/>
+                </a:solidFill>
+                <a:latin typeface="Vazirmatn"/>
+              </a:rPr>
+              <a:t>دورهٔ یادگیری ماشین</a:t>
+            </a:r>
+          </a:p>
+        </p:txBody>
+      </p:sp>
+      <p:sp>
+        <p:nvSpPr>
+          <p:cNvPr id="3" name="TextBox 2"/>
+          <p:cNvSpPr txBox="1"/>
+          <p:nvPr/>
+        </p:nvSpPr>
+        <p:spPr>
+          <a:xfrm>
+            <a:off x="731520" y="457200"/>
+            <a:ext cx="10728655" cy="1097280"/>
+          </a:xfrm>
+          <a:prstGeom prst="rect">
+            <a:avLst/>
+          </a:prstGeom>
+          <a:noFill/>
+        </p:spPr>
+        <p:txBody>
+          <a:bodyPr wrap="square">
+            <a:spAutoFit/>
+          </a:bodyPr>
+          <a:lstStyle/>
+          <a:p>
+            <a:pPr algn="r" rtl="1"/>
+            <a:r>
+              <a:rPr sz="3400" b="1">
+                <a:solidFill>
+                  <a:srgbClr val="3C4043"/>
+                </a:solidFill>
+                <a:latin typeface="Vazirmatn"/>
+              </a:rPr>
+              <a:t>تمرین‌های خانه (۴ تا)</a:t>
+            </a:r>
+          </a:p>
+        </p:txBody>
+      </p:sp>
+      <p:sp>
+        <p:nvSpPr>
+          <p:cNvPr id="4" name="TextBox 3"/>
+          <p:cNvSpPr txBox="1"/>
+          <p:nvPr/>
+        </p:nvSpPr>
+        <p:spPr>
+          <a:xfrm>
+            <a:off x="731520" y="1463040"/>
+            <a:ext cx="10728655" cy="502920"/>
+          </a:xfrm>
+          <a:prstGeom prst="rect">
+            <a:avLst/>
+          </a:prstGeom>
+          <a:noFill/>
+        </p:spPr>
+        <p:txBody>
+          <a:bodyPr wrap="square">
+            <a:spAutoFit/>
+          </a:bodyPr>
+          <a:lstStyle/>
+          <a:p>
+            <a:pPr algn="r" rtl="1"/>
+            <a:r>
+              <a:rPr sz="1900">
+                <a:solidFill>
+                  <a:srgbClr val="3C4043"/>
+                </a:solidFill>
+                <a:latin typeface="Vazirmatn"/>
+              </a:rPr>
+              <a:t>• B1 کارآگاه ویژگی‌ها</a:t>
+            </a:r>
+          </a:p>
+        </p:txBody>
+      </p:sp>
+      <p:sp>
+        <p:nvSpPr>
+          <p:cNvPr id="5" name="TextBox 4"/>
+          <p:cNvSpPr txBox="1"/>
+          <p:nvPr/>
+        </p:nvSpPr>
+        <p:spPr>
+          <a:xfrm>
+            <a:off x="731520" y="1874520"/>
+            <a:ext cx="10728655" cy="502920"/>
+          </a:xfrm>
+          <a:prstGeom prst="rect">
+            <a:avLst/>
+          </a:prstGeom>
+          <a:noFill/>
+        </p:spPr>
+        <p:txBody>
+          <a:bodyPr wrap="square">
+            <a:spAutoFit/>
+          </a:bodyPr>
+          <a:lstStyle/>
+          <a:p>
+            <a:pPr algn="r" rtl="1"/>
+            <a:r>
+              <a:rPr sz="1900">
+                <a:solidFill>
+                  <a:srgbClr val="3C4043"/>
+                </a:solidFill>
+                <a:latin typeface="Vazirmatn"/>
+              </a:rPr>
+              <a:t>• B2 دیتاست خودت را بساز</a:t>
+            </a:r>
+          </a:p>
+        </p:txBody>
+      </p:sp>
+      <p:sp>
+        <p:nvSpPr>
+          <p:cNvPr id="6" name="TextBox 5"/>
+          <p:cNvSpPr txBox="1"/>
+          <p:nvPr/>
+        </p:nvSpPr>
+        <p:spPr>
+          <a:xfrm>
+            <a:off x="731520" y="2286000"/>
+            <a:ext cx="10728655" cy="502920"/>
+          </a:xfrm>
+          <a:prstGeom prst="rect">
+            <a:avLst/>
+          </a:prstGeom>
+          <a:noFill/>
+        </p:spPr>
+        <p:txBody>
+          <a:bodyPr wrap="square">
+            <a:spAutoFit/>
+          </a:bodyPr>
+          <a:lstStyle/>
+          <a:p>
+            <a:pPr algn="r" rtl="1"/>
+            <a:r>
+              <a:rPr sz="1900">
+                <a:solidFill>
+                  <a:srgbClr val="3C4043"/>
+                </a:solidFill>
+                <a:latin typeface="Vazirmatn"/>
+              </a:rPr>
+              <a:t>• B3 سه خط جادویی روی حیوانات خودت</a:t>
+            </a:r>
+          </a:p>
+        </p:txBody>
+      </p:sp>
+      <p:sp>
+        <p:nvSpPr>
+          <p:cNvPr id="7" name="TextBox 6"/>
+          <p:cNvSpPr txBox="1"/>
+          <p:nvPr/>
+        </p:nvSpPr>
+        <p:spPr>
+          <a:xfrm>
+            <a:off x="731520" y="2697480"/>
+            <a:ext cx="10728655" cy="502920"/>
+          </a:xfrm>
+          <a:prstGeom prst="rect">
+            <a:avLst/>
+          </a:prstGeom>
+          <a:noFill/>
+        </p:spPr>
+        <p:txBody>
+          <a:bodyPr wrap="square">
+            <a:spAutoFit/>
+          </a:bodyPr>
+          <a:lstStyle/>
+          <a:p>
+            <a:pPr algn="r" rtl="1"/>
+            <a:r>
+              <a:rPr sz="1900">
+                <a:solidFill>
+                  <a:srgbClr val="3C4043"/>
+                </a:solidFill>
+                <a:latin typeface="Vazirmatn"/>
+              </a:rPr>
+              <a:t>• B4 پیش‌بینی‌گر بقا</a:t>
+            </a:r>
+          </a:p>
+        </p:txBody>
+      </p:sp>
+      <p:sp>
+        <p:nvSpPr>
+          <p:cNvPr id="8" name="TextBox 7"/>
+          <p:cNvSpPr txBox="1"/>
+          <p:nvPr/>
+        </p:nvSpPr>
+        <p:spPr>
+          <a:xfrm>
+            <a:off x="731520" y="3108960"/>
             <a:ext cx="10728655" cy="640080"/>
           </a:xfrm>
           <a:prstGeom prst="rect">
@@ -10255,14 +10651,215 @@
                 </a:solidFill>
                 <a:latin typeface="Vazirmatn"/>
               </a:rPr>
-              <a:t>آن‌ها سوخت جلسهٔ بعدی ما هستند.</a:t>
+              <a:t>python judge/run.py s01_notebook.ipynb ← نمرهٔ فوری، هر وقت خواستی</a:t>
+            </a:r>
+          </a:p>
+        </p:txBody>
+      </p:sp>
+      <p:sp>
+        <p:nvSpPr>
+          <p:cNvPr id="9" name="TextBox 8"/>
+          <p:cNvSpPr txBox="1"/>
+          <p:nvPr/>
+        </p:nvSpPr>
+        <p:spPr>
+          <a:xfrm>
+            <a:off x="274320" y="6400800"/>
+            <a:ext cx="1097280" cy="320040"/>
+          </a:xfrm>
+          <a:prstGeom prst="rect">
+            <a:avLst/>
+          </a:prstGeom>
+          <a:noFill/>
+        </p:spPr>
+        <p:txBody>
+          <a:bodyPr wrap="none">
+            <a:spAutoFit/>
+          </a:bodyPr>
+          <a:lstStyle/>
+          <a:p>
+            <a:pPr algn="l"/>
+            <a:r>
+              <a:rPr sz="1200">
+                <a:solidFill>
+                  <a:srgbClr val="3C4043"/>
+                </a:solidFill>
+                <a:latin typeface="Vazirmatn"/>
+              </a:rPr>
+              <a:t>27 / 28</a:t>
+            </a:r>
+          </a:p>
+        </p:txBody>
+      </p:sp>
+    </p:spTree>
+  </p:cSld>
+  <p:clrMapOvr>
+    <a:masterClrMapping/>
+  </p:clrMapOvr>
+</p:sld>
+</file>
+
+<file path=ppt/slides/slide28.xml><?xml version="1.0" encoding="utf-8"?>
+<p:sld xmlns:a="http://schemas.openxmlformats.org/drawingml/2006/main" xmlns:p="http://schemas.openxmlformats.org/presentationml/2006/main" xmlns:r="http://schemas.openxmlformats.org/officeDocument/2006/relationships">
+  <p:cSld>
+    <p:bg>
+      <p:bgPr>
+        <a:solidFill>
+          <a:srgbClr val="7DB6FF"/>
+        </a:solidFill>
+        <a:effectLst/>
+      </p:bgPr>
+    </p:bg>
+    <p:spTree>
+      <p:nvGrpSpPr>
+        <p:cNvPr id="1" name=""/>
+        <p:cNvGrpSpPr/>
+        <p:nvPr/>
+      </p:nvGrpSpPr>
+      <p:grpSpPr/>
+      <p:sp>
+        <p:nvSpPr>
+          <p:cNvPr id="2" name="TextBox 1"/>
+          <p:cNvSpPr txBox="1"/>
+          <p:nvPr/>
+        </p:nvSpPr>
+        <p:spPr>
+          <a:xfrm>
+            <a:off x="502920" y="164592"/>
+            <a:ext cx="3200400" cy="274320"/>
+          </a:xfrm>
+          <a:prstGeom prst="rect">
+            <a:avLst/>
+          </a:prstGeom>
+          <a:noFill/>
+        </p:spPr>
+        <p:txBody>
+          <a:bodyPr wrap="none">
+            <a:spAutoFit/>
+          </a:bodyPr>
+          <a:lstStyle/>
+          <a:p>
+            <a:pPr algn="r" rtl="1"/>
+            <a:r>
+              <a:rPr sz="1100">
+                <a:solidFill>
+                  <a:srgbClr val="3C4043"/>
+                </a:solidFill>
+                <a:latin typeface="Vazirmatn"/>
+              </a:rPr>
+              <a:t>دورهٔ یادگیری ماشین</a:t>
+            </a:r>
+          </a:p>
+        </p:txBody>
+      </p:sp>
+      <p:sp>
+        <p:nvSpPr>
+          <p:cNvPr id="3" name="TextBox 2"/>
+          <p:cNvSpPr txBox="1"/>
+          <p:nvPr/>
+        </p:nvSpPr>
+        <p:spPr>
+          <a:xfrm>
+            <a:off x="731520" y="457200"/>
+            <a:ext cx="10728655" cy="1097280"/>
+          </a:xfrm>
+          <a:prstGeom prst="rect">
+            <a:avLst/>
+          </a:prstGeom>
+          <a:noFill/>
+        </p:spPr>
+        <p:txBody>
+          <a:bodyPr wrap="square">
+            <a:spAutoFit/>
+          </a:bodyPr>
+          <a:lstStyle/>
+          <a:p>
+            <a:pPr algn="r" rtl="1"/>
+            <a:r>
+              <a:rPr sz="4000" b="1">
+                <a:solidFill>
+                  <a:srgbClr val="3C4043"/>
+                </a:solidFill>
+                <a:latin typeface="Vazirmatn"/>
+              </a:rPr>
+              <a:t>جلسهٔ بعد</a:t>
+            </a:r>
+          </a:p>
+        </p:txBody>
+      </p:sp>
+      <p:sp>
+        <p:nvSpPr>
+          <p:cNvPr id="4" name="TextBox 3"/>
+          <p:cNvSpPr txBox="1"/>
+          <p:nvPr/>
+        </p:nvSpPr>
+        <p:spPr>
+          <a:xfrm>
+            <a:off x="731520" y="1463040"/>
+            <a:ext cx="10728655" cy="640080"/>
+          </a:xfrm>
+          <a:prstGeom prst="rect">
+            <a:avLst/>
+          </a:prstGeom>
+          <a:noFill/>
+        </p:spPr>
+        <p:txBody>
+          <a:bodyPr wrap="square">
+            <a:spAutoFit/>
+          </a:bodyPr>
+          <a:lstStyle/>
+          <a:p>
+            <a:pPr algn="r" rtl="1"/>
+            <a:r>
+              <a:rPr sz="1800">
+                <a:solidFill>
+                  <a:srgbClr val="3C4043"/>
+                </a:solidFill>
+                <a:latin typeface="Vazirmatn"/>
+              </a:rPr>
+              <a:t>تمرین‌هایت را همان‌جا، با هم حل می‌کنیم.</a:t>
+            </a:r>
+          </a:p>
+        </p:txBody>
+      </p:sp>
+      <p:sp>
+        <p:nvSpPr>
+          <p:cNvPr id="5" name="TextBox 4"/>
+          <p:cNvSpPr txBox="1"/>
+          <p:nvPr/>
+        </p:nvSpPr>
+        <p:spPr>
+          <a:xfrm>
+            <a:off x="731520" y="1965960"/>
+            <a:ext cx="10728655" cy="640080"/>
+          </a:xfrm>
+          <a:prstGeom prst="rect">
+            <a:avLst/>
+          </a:prstGeom>
+          <a:noFill/>
+        </p:spPr>
+        <p:txBody>
+          <a:bodyPr wrap="square">
+            <a:spAutoFit/>
+          </a:bodyPr>
+          <a:lstStyle/>
+          <a:p>
+            <a:pPr algn="r" rtl="1"/>
+            <a:r>
+              <a:rPr sz="1800">
+                <a:solidFill>
+                  <a:srgbClr val="3C4043"/>
+                </a:solidFill>
+                <a:latin typeface="Vazirmatn"/>
+              </a:rPr>
+              <a:t>حتی کدهای خراب را بیاور — آن‌ها سوختِ جلسهٔ بعدی است.</a:t>
             </a:r>
           </a:p>
         </p:txBody>
       </p:sp>
       <p:pic>
         <p:nvPicPr>
-          <p:cNvPr id="7" name="Picture 6" descr="shared_closing.png"/>
+          <p:cNvPr id="6" name="Picture 5" descr="shared_closing.png"/>
           <p:cNvPicPr>
             <a:picLocks noChangeAspect="1"/>
           </p:cNvPicPr>
@@ -10286,7 +10883,7 @@
       </p:pic>
       <p:sp>
         <p:nvSpPr>
-          <p:cNvPr id="8" name="TextBox 7"/>
+          <p:cNvPr id="7" name="TextBox 6"/>
           <p:cNvSpPr txBox="1"/>
           <p:nvPr/>
         </p:nvSpPr>
@@ -10314,7 +10911,7 @@
                 </a:solidFill>
                 <a:latin typeface="Vazirmatn"/>
               </a:rPr>
-              <a:t>26 / 26</a:t>
+              <a:t>28 / 28</a:t>
             </a:r>
           </a:p>
         </p:txBody>
@@ -10333,7 +10930,7 @@
     <p:bg>
       <p:bgPr>
         <a:solidFill>
-          <a:srgbClr val="EDF4FB"/>
+          <a:srgbClr val="EAF3FE"/>
         </a:solidFill>
         <a:effectLst/>
       </p:bgPr>
@@ -10406,7 +11003,7 @@
             <a:r>
               <a:rPr sz="3400" b="1">
                 <a:solidFill>
-                  <a:srgbClr val="2B6CB0"/>
+                  <a:srgbClr val="1F6FEB"/>
                 </a:solidFill>
                 <a:latin typeface="Vazirmatn"/>
               </a:rPr>
@@ -10550,7 +11147,7 @@
                 </a:solidFill>
                 <a:latin typeface="Vazirmatn"/>
               </a:rPr>
-              <a:t>3 / 26</a:t>
+              <a:t>3 / 28</a:t>
             </a:r>
           </a:p>
         </p:txBody>
@@ -10569,7 +11166,7 @@
     <p:bg>
       <p:bgPr>
         <a:solidFill>
-          <a:srgbClr val="EDF4FB"/>
+          <a:srgbClr val="EAF3FE"/>
         </a:solidFill>
         <a:effectLst/>
       </p:bgPr>
@@ -10642,7 +11239,7 @@
             <a:r>
               <a:rPr sz="3400" b="1">
                 <a:solidFill>
-                  <a:srgbClr val="2B6CB0"/>
+                  <a:srgbClr val="1F6FEB"/>
                 </a:solidFill>
                 <a:latin typeface="Vazirmatn"/>
               </a:rPr>
@@ -10810,7 +11407,7 @@
                 </a:solidFill>
                 <a:latin typeface="Vazirmatn"/>
               </a:rPr>
-              <a:t>4 / 26</a:t>
+              <a:t>4 / 28</a:t>
             </a:r>
           </a:p>
         </p:txBody>
@@ -10829,7 +11426,7 @@
     <p:bg>
       <p:bgPr>
         <a:solidFill>
-          <a:srgbClr val="EDF4FB"/>
+          <a:srgbClr val="EAF3FE"/>
         </a:solidFill>
         <a:effectLst/>
       </p:bgPr>
@@ -10902,7 +11499,7 @@
             <a:r>
               <a:rPr sz="3400" b="1">
                 <a:solidFill>
-                  <a:srgbClr val="2B6CB0"/>
+                  <a:srgbClr val="1F6FEB"/>
                 </a:solidFill>
                 <a:latin typeface="Vazirmatn"/>
               </a:rPr>
@@ -11046,7 +11643,7 @@
                 </a:solidFill>
                 <a:latin typeface="Vazirmatn"/>
               </a:rPr>
-              <a:t>یک سؤال ساده، جاهای خالیِ خط را پر می‌کند.</a:t>
+              <a:t>کل رازش فقط یک سؤال بود: «وزن ⁦≤ ۱۴⁩ کیلوگرم؟»</a:t>
             </a:r>
           </a:p>
         </p:txBody>
@@ -11081,7 +11678,7 @@
                 </a:solidFill>
                 <a:latin typeface="Vazirmatn"/>
               </a:rPr>
-              <a:t>5 / 26</a:t>
+              <a:t>5 / 28</a:t>
             </a:r>
           </a:p>
         </p:txBody>
@@ -11100,7 +11697,7 @@
     <p:bg>
       <p:bgPr>
         <a:solidFill>
-          <a:srgbClr val="EDF4FB"/>
+          <a:srgbClr val="EAF3FE"/>
         </a:solidFill>
         <a:effectLst/>
       </p:bgPr>
@@ -11247,7 +11844,7 @@
                 </a:solidFill>
                 <a:latin typeface="Vazirmatn"/>
               </a:rPr>
-              <a:t>6 / 26</a:t>
+              <a:t>6 / 28</a:t>
             </a:r>
           </a:p>
         </p:txBody>
@@ -11266,7 +11863,7 @@
     <p:bg>
       <p:bgPr>
         <a:solidFill>
-          <a:srgbClr val="EDF4FB"/>
+          <a:srgbClr val="EAF3FE"/>
         </a:solidFill>
         <a:effectLst/>
       </p:bgPr>
@@ -11322,7 +11919,7 @@
         <p:spPr>
           <a:xfrm>
             <a:off x="731520" y="457200"/>
-            <a:ext cx="10728655" cy="640080"/>
+            <a:ext cx="10728655" cy="1097280"/>
           </a:xfrm>
           <a:prstGeom prst="rect">
             <a:avLst/>
@@ -11337,7 +11934,7 @@
           <a:p>
             <a:pPr algn="r" rtl="1"/>
             <a:r>
-              <a:rPr sz="1800">
+              <a:rPr sz="3400" b="1">
                 <a:solidFill>
                   <a:srgbClr val="3C4043"/>
                 </a:solidFill>
@@ -11351,41 +11948,6 @@
       <p:sp>
         <p:nvSpPr>
           <p:cNvPr id="4" name="TextBox 3"/>
-          <p:cNvSpPr txBox="1"/>
-          <p:nvPr/>
-        </p:nvSpPr>
-        <p:spPr>
-          <a:xfrm>
-            <a:off x="731520" y="960120"/>
-            <a:ext cx="10728655" cy="640080"/>
-          </a:xfrm>
-          <a:prstGeom prst="rect">
-            <a:avLst/>
-          </a:prstGeom>
-          <a:noFill/>
-        </p:spPr>
-        <p:txBody>
-          <a:bodyPr wrap="square">
-            <a:spAutoFit/>
-          </a:bodyPr>
-          <a:lstStyle/>
-          <a:p>
-            <a:pPr algn="r" rtl="1"/>
-            <a:r>
-              <a:rPr sz="1800">
-                <a:solidFill>
-                  <a:srgbClr val="3C4043"/>
-                </a:solidFill>
-                <a:latin typeface="Vazirmatn"/>
-              </a:rPr>
-              <a:t>داده + قاعده‌ها ← پاسخ</a:t>
-            </a:r>
-          </a:p>
-        </p:txBody>
-      </p:sp>
-      <p:sp>
-        <p:nvSpPr>
-          <p:cNvPr id="5" name="TextBox 4"/>
           <p:cNvSpPr txBox="1"/>
           <p:nvPr/>
         </p:nvSpPr>
@@ -11413,14 +11975,14 @@
                 </a:solidFill>
                 <a:latin typeface="Vazirmatn"/>
               </a:rPr>
-              <a:t>انسان هر قاعده را با دست می‌نویسد.</a:t>
-            </a:r>
-          </a:p>
-        </p:txBody>
-      </p:sp>
-      <p:sp>
-        <p:nvSpPr>
-          <p:cNvPr id="6" name="TextBox 5"/>
+              <a:t>داده + قاعده‌ها ← پاسخ</a:t>
+            </a:r>
+          </a:p>
+        </p:txBody>
+      </p:sp>
+      <p:sp>
+        <p:nvSpPr>
+          <p:cNvPr id="5" name="TextBox 4"/>
           <p:cNvSpPr txBox="1"/>
           <p:nvPr/>
         </p:nvSpPr>
@@ -11448,6 +12010,41 @@
                 </a:solidFill>
                 <a:latin typeface="Vazirmatn"/>
               </a:rPr>
+              <a:t>انسان هر قاعده را با دست می‌نویسد.</a:t>
+            </a:r>
+          </a:p>
+        </p:txBody>
+      </p:sp>
+      <p:sp>
+        <p:nvSpPr>
+          <p:cNvPr id="6" name="TextBox 5"/>
+          <p:cNvSpPr txBox="1"/>
+          <p:nvPr/>
+        </p:nvSpPr>
+        <p:spPr>
+          <a:xfrm>
+            <a:off x="731520" y="2468880"/>
+            <a:ext cx="10728655" cy="640080"/>
+          </a:xfrm>
+          <a:prstGeom prst="rect">
+            <a:avLst/>
+          </a:prstGeom>
+          <a:noFill/>
+        </p:spPr>
+        <p:txBody>
+          <a:bodyPr wrap="square">
+            <a:spAutoFit/>
+          </a:bodyPr>
+          <a:lstStyle/>
+          <a:p>
+            <a:pPr algn="r" rtl="1"/>
+            <a:r>
+              <a:rPr sz="1800">
+                <a:solidFill>
+                  <a:srgbClr val="3C4043"/>
+                </a:solidFill>
+                <a:latin typeface="Vazirmatn"/>
+              </a:rPr>
               <a:t>«اگر سبیل داشت و خرخر می‌کرد، پس گربه است»</a:t>
             </a:r>
           </a:p>
@@ -11483,7 +12080,7 @@
                 </a:solidFill>
                 <a:latin typeface="Vazirmatn"/>
               </a:rPr>
-              <a:t>7 / 26</a:t>
+              <a:t>7 / 28</a:t>
             </a:r>
           </a:p>
         </p:txBody>
@@ -11502,7 +12099,7 @@
     <p:bg>
       <p:bgPr>
         <a:solidFill>
-          <a:srgbClr val="EDF4FB"/>
+          <a:srgbClr val="EAF3FE"/>
         </a:solidFill>
         <a:effectLst/>
       </p:bgPr>
@@ -11743,7 +12340,7 @@
                 </a:solidFill>
                 <a:latin typeface="Vazirmatn"/>
               </a:rPr>
-              <a:t>8 / 26</a:t>
+              <a:t>8 / 28</a:t>
             </a:r>
           </a:p>
         </p:txBody>
@@ -11762,7 +12359,7 @@
     <p:bg>
       <p:bgPr>
         <a:solidFill>
-          <a:srgbClr val="EDF4FB"/>
+          <a:srgbClr val="EAF3FE"/>
         </a:solidFill>
         <a:effectLst/>
       </p:bgPr>
@@ -11979,7 +12576,7 @@
                 </a:solidFill>
                 <a:latin typeface="Vazirmatn"/>
               </a:rPr>
-              <a:t>9 / 26</a:t>
+              <a:t>9 / 28</a:t>
             </a:r>
           </a:p>
         </p:txBody>

--- a/sessions/s01_what_is_machine_learning/teaching/slides/slides.pptx
+++ b/sessions/s01_what_is_machine_learning/teaching/slides/slides.pptx
@@ -2441,7 +2441,7 @@
               <a:rPr>
                 <a:latin typeface="Vazirmatn"/>
               </a:rPr>
-              <a:t>[RUN: PART 0 demo cell — مرحلهٔ ۱, the «جدول» marker] The 8-row table is ALL the machine sees.</a:t>
+              <a:t>[RUN: PART 0 demo cell — prints "stage 1 - the table"] The 8-row table is ALL the machine sees.</a:t>
             </a:r>
           </a:p>
           <a:p>
@@ -2530,7 +2530,7 @@
               <a:rPr>
                 <a:latin typeface="Vazirmatn"/>
               </a:rPr>
-              <a:t>[RUN: PART 0 demo cell — مرحلهٔ ۳, the «خطِ ماشین» marker] The scatter: the machine's own red dashed line.</a:t>
+              <a:t>[RUN: PART 0 demo cell — prints "stage 3 - the machine's line"] The scatter: the machine's own red dashed line.</a:t>
             </a:r>
           </a:p>
           <a:p>
@@ -2538,7 +2538,7 @@
               <a:rPr>
                 <a:latin typeface="Vazirmatn"/>
               </a:rPr>
-              <a:t>(مرحلهٔ ۲ was the silent .fit() — one invisible line of code.)</a:t>
+              <a:t>(stage 2 was the silent .fit() — one invisible line of code.)</a:t>
             </a:r>
           </a:p>
           <a:p>
@@ -2627,7 +2627,7 @@
               <a:rPr>
                 <a:latin typeface="Vazirmatn"/>
               </a:rPr>
-              <a:t>[RUN: PART 0 demo cell — مرحلهٔ ۴, the «امتحان با حیوانات ندیده» marker] Verdicts on unseen animals.</a:t>
+              <a:t>[RUN: PART 0 demo cell — prints "stage 4 - exam with unseen animals"] Verdicts on unseen animals.</a:t>
             </a:r>
           </a:p>
           <a:p>
@@ -10624,41 +10624,6 @@
       <p:sp>
         <p:nvSpPr>
           <p:cNvPr id="8" name="TextBox 7"/>
-          <p:cNvSpPr txBox="1"/>
-          <p:nvPr/>
-        </p:nvSpPr>
-        <p:spPr>
-          <a:xfrm>
-            <a:off x="731520" y="3108960"/>
-            <a:ext cx="10728655" cy="640080"/>
-          </a:xfrm>
-          <a:prstGeom prst="rect">
-            <a:avLst/>
-          </a:prstGeom>
-          <a:noFill/>
-        </p:spPr>
-        <p:txBody>
-          <a:bodyPr wrap="square">
-            <a:spAutoFit/>
-          </a:bodyPr>
-          <a:lstStyle/>
-          <a:p>
-            <a:pPr algn="r" rtl="1"/>
-            <a:r>
-              <a:rPr sz="1800">
-                <a:solidFill>
-                  <a:srgbClr val="3C4043"/>
-                </a:solidFill>
-                <a:latin typeface="Vazirmatn"/>
-              </a:rPr>
-              <a:t>python judge/run.py s01_notebook.ipynb ← نمرهٔ فوری، هر وقت خواستی</a:t>
-            </a:r>
-          </a:p>
-        </p:txBody>
-      </p:sp>
-      <p:sp>
-        <p:nvSpPr>
-          <p:cNvPr id="9" name="TextBox 8"/>
           <p:cNvSpPr txBox="1"/>
           <p:nvPr/>
         </p:nvSpPr>
